--- a/lecons/LSA/Meteorology/04_LSA_MET_L04_The_Earth_s_Radiation_Balance.pptx
+++ b/lecons/LSA/Meteorology/04_LSA_MET_L04_The_Earth_s_Radiation_Balance.pptx
@@ -65,10 +65,9 @@
     <p:sldId id="313" r:id="rId59"/>
     <p:sldId id="314" r:id="rId60"/>
     <p:sldId id="315" r:id="rId61"/>
-    <p:sldId id="316" r:id="rId62"/>
   </p:sldIdLst>
   <p:notesMasterIdLst>
-    <p:notesMasterId r:id="rId63"/>
+    <p:notesMasterId r:id="rId62"/>
   </p:notesMasterIdLst>
   <p:sldSz cx="12192000" cy="6858000"/>
   <p:notesSz cx="6858000" cy="12192000"/>
@@ -3202,7 +3201,7 @@
           <a:p>
             <a:r>
               <a:rPr lang="en-US" dirty="0"/>
-              <a:t>We continue with the definitions. On this slide we have Energy surplus and Energy deficit. Write each point on a new line, with the key term first, and explain it in your own words when we revise.</a:t>
+              <a:t>We continue with the definitions. On this slide we have Positive balance (surplus) and Negative balance (deficit). Write each point on a new line, with the key term first, and explain it in your own words when we revise.</a:t>
             </a:r>
             <a:endParaRPr lang="en-US" dirty="0"/>
           </a:p>
@@ -3290,7 +3289,7 @@
           <a:p>
             <a:r>
               <a:rPr lang="en-US" dirty="0"/>
-              <a:t>Let us copy The Global Heat Budget. The global heat budget is presented as follows. Copy the point on Global balance on the left, then draw the diagram on the right: the radiation balance. Give it a title and label it clearly.</a:t>
+              <a:t>Let us copy The Global Radiation Balance. The Earth as a whole has the following radiation balance. Copy the point on Global balance on the left, then draw the diagram on the right: the radiation balance. Give it a title and label it clearly.</a:t>
             </a:r>
             <a:endParaRPr lang="en-US" dirty="0"/>
           </a:p>
@@ -3378,7 +3377,7 @@
           <a:p>
             <a:r>
               <a:rPr lang="en-US" dirty="0"/>
-              <a:t>Copy the point on Greenhouse effect on the left, then draw the diagram on the right: the greenhouse effect. Give it a title and label it clearly.</a:t>
+              <a:t>Copy the point on The greenhouse effect on the left, then draw the diagram on the right: the greenhouse effect. Give it a title and label it clearly.</a:t>
             </a:r>
             <a:endParaRPr lang="en-US" dirty="0"/>
           </a:p>
@@ -3554,7 +3553,7 @@
           <a:p>
             <a:r>
               <a:rPr lang="en-US" dirty="0"/>
-              <a:t>We continue with The Global Heat Budget. On this slide we have Unequal by latitude. Write each point on a new line, with the key term first, and explain it in your own words when we revise.</a:t>
+              <a:t>Let us copy Zones of Positive and Negative Balance. The balance differs between the following latitudinal zones. Copy the point on The inter-tropical zone (positive balance) on the left, then draw the diagram on the right: zones of surplus and deficit. Give it a title and label it clearly.</a:t>
             </a:r>
             <a:endParaRPr lang="en-US" dirty="0"/>
           </a:p>
@@ -3642,7 +3641,7 @@
           <a:p>
             <a:r>
               <a:rPr lang="en-US" dirty="0"/>
-              <a:t>Let us copy The Latitudinal Heat Imbalance. The zones of surplus and deficit are the following. Copy the point on Zone of surplus on the left, then draw the diagram on the right: surplus and deficit. Give it a title and label it clearly.</a:t>
+              <a:t>We continue with Zones of Positive and Negative Balance. Copy the point on Mid-latitudes and polar zones (negative balance): write the key term first, then its explanation.</a:t>
             </a:r>
             <a:endParaRPr lang="en-US" dirty="0"/>
           </a:p>
@@ -3730,7 +3729,7 @@
           <a:p>
             <a:r>
               <a:rPr lang="en-US" dirty="0"/>
-              <a:t>We continue with The Latitudinal Heat Imbalance. On this slide we have Zones of deficit. Write each point on a new line, with the key term first, and explain it in your own words when we revise.</a:t>
+              <a:t>Let us copy Reasons for the Differences. The differences between the zones are explained by the following reasons. Copy the point on Angle of incidence on the left, then draw the diagram on the right: the angle of the sun rays. Give it a title and label it clearly.</a:t>
             </a:r>
             <a:endParaRPr lang="en-US" dirty="0"/>
           </a:p>
@@ -3818,7 +3817,7 @@
           <a:p>
             <a:r>
               <a:rPr lang="en-US" dirty="0"/>
-              <a:t>Let us copy Reasons for the Imbalance. The reasons for the latitudinal imbalance are the following. Copy the point on Angle of incidence on the left, then draw the diagram on the right: direct and slanting rays. Give it a title and label it clearly.</a:t>
+              <a:t>Copy the point on Thickness of atmosphere crossed on the left, then draw the diagram on the right: the path of the rays. Give it a title and label it clearly.</a:t>
             </a:r>
             <a:endParaRPr lang="en-US" dirty="0"/>
           </a:p>
@@ -3906,7 +3905,7 @@
           <a:p>
             <a:r>
               <a:rPr lang="en-US" dirty="0"/>
-              <a:t>We continue with Reasons for the Imbalance. On this slide we have Albedo. Write each point on a new line, with the key term first, and explain it in your own words when we revise.</a:t>
+              <a:t>We continue with Reasons for the Differences. Copy the point on Albedo: write the key term first, then its explanation.</a:t>
             </a:r>
             <a:endParaRPr lang="en-US" dirty="0"/>
           </a:p>
@@ -3994,7 +3993,7 @@
           <a:p>
             <a:r>
               <a:rPr lang="en-US" dirty="0"/>
-              <a:t>Copy the point on Atmospheric path on the left, then draw the diagram on the right: reasons for the imbalance. Give it a title and label it clearly.</a:t>
+              <a:t>We continue with Reasons for the Differences. Copy the point on Length of day: write the key term first, then its explanation.</a:t>
             </a:r>
             <a:endParaRPr lang="en-US" dirty="0"/>
           </a:p>
@@ -4082,7 +4081,7 @@
           <a:p>
             <a:r>
               <a:rPr lang="en-US" dirty="0"/>
-              <a:t>We continue with Reasons for the Imbalance. On this slide we have Length of day. Write each point on a new line, with the key term first, and explain it in your own words when we revise.</a:t>
+              <a:t>Let us copy Balancing Mechanisms. The surplus of the tropics is carried to the zones of deficit by the following mechanisms. Copy the point on Atmospheric circulation on the left, then draw the diagram on the right: heat transfer towards the poles. Give it a title and label it clearly.</a:t>
             </a:r>
             <a:endParaRPr lang="en-US" dirty="0"/>
           </a:p>
@@ -4170,7 +4169,7 @@
           <a:p>
             <a:r>
               <a:rPr lang="en-US" dirty="0"/>
-              <a:t>Let us copy Balancing Mechanisms (Global Heat Transfer). Heat is transferred from the tropics towards the poles as follows. Copy the point on Atmospheric circulation on the left, then draw the diagram on the right: heat transfer. Give it a title and label it clearly.</a:t>
+              <a:t>Copy the point on Ocean currents on the left, then draw the diagram on the right: ocean currents. Give it a title and label it clearly.</a:t>
             </a:r>
             <a:endParaRPr lang="en-US" dirty="0"/>
           </a:p>
@@ -4258,7 +4257,7 @@
           <a:p>
             <a:r>
               <a:rPr lang="en-US" dirty="0"/>
-              <a:t>Copy the point on Ocean currents on the left, then draw the diagram on the right: ocean currents. Give it a title and label it clearly.</a:t>
+              <a:t>We continue with Balancing Mechanisms. Copy the point on Transfer of latent heat: write the key term first, then its explanation.</a:t>
             </a:r>
             <a:endParaRPr lang="en-US" dirty="0"/>
           </a:p>
@@ -4346,7 +4345,7 @@
           <a:p>
             <a:r>
               <a:rPr lang="en-US" dirty="0"/>
-              <a:t>We continue with Balancing Mechanisms (Global Heat Transfer). On this slide we have Result. Write each point on a new line, with the key term first, and explain it in your own words when we revise.</a:t>
+              <a:t>Now let us check what you have understood. Question 1: Why does a farmer in Garoua receive more intense heat than a fisherman in Norway? Answer in your exercise book.</a:t>
             </a:r>
             <a:endParaRPr lang="en-US" dirty="0"/>
           </a:p>
@@ -4522,7 +4521,7 @@
           <a:p>
             <a:r>
               <a:rPr lang="en-US" dirty="0"/>
-              <a:t>Now let us check what you have understood. Question 1: Why does a farmer in Garoua receive more intense heat than a fisherman in Norway? Answer in your exercise book.</a:t>
+              <a:t>The expected answer is: the sun is high over Garoua, so its rays are concentrated; in Norway the rays are slanting and spread out. If you got it right, well done.</a:t>
             </a:r>
             <a:endParaRPr lang="en-US" dirty="0"/>
           </a:p>
@@ -4610,7 +4609,7 @@
           <a:p>
             <a:r>
               <a:rPr lang="en-US" dirty="0"/>
-              <a:t>The expected answer is: the sun is high over Garoua, so its rays are concentrated; in Norway the rays are slanting and spread out. If you got it right, well done.</a:t>
+              <a:t>Now let us check what you have understood. Question 2: Give two mechanisms that transfer heat from the tropics to the poles. Answer in your exercise book.</a:t>
             </a:r>
             <a:endParaRPr lang="en-US" dirty="0"/>
           </a:p>
@@ -4698,7 +4697,7 @@
           <a:p>
             <a:r>
               <a:rPr lang="en-US" dirty="0"/>
-              <a:t>Now let us check what you have understood. Question 2: Give two mechanisms that transfer heat from the tropics to the poles. Answer in your exercise book.</a:t>
+              <a:t>The expected answer is: winds (atmospheric circulation) and ocean currents. If you got it right, well done.</a:t>
             </a:r>
             <a:endParaRPr lang="en-US" dirty="0"/>
           </a:p>
@@ -4786,7 +4785,7 @@
           <a:p>
             <a:r>
               <a:rPr lang="en-US" dirty="0"/>
-              <a:t>The expected answer is: winds (atmospheric circulation) and ocean currents. If you got it right, well done.</a:t>
+              <a:t>For those who need more practice, fill in the blanks in your exercise book. The answers are: number 1, surplus; number 2, albedo; number 3, warm.</a:t>
             </a:r>
             <a:endParaRPr lang="en-US" dirty="0"/>
           </a:p>
@@ -4874,7 +4873,7 @@
           <a:p>
             <a:r>
               <a:rPr lang="en-US" dirty="0"/>
-              <a:t>For those who need more practice, fill in the blanks in your exercise book. The answers are: number 1, surplus; number 2, albedo; number 3, warm.</a:t>
+              <a:t>For your homework: Define advection. We shall correct it at the beginning of our next lesson.</a:t>
             </a:r>
             <a:endParaRPr lang="en-US" dirty="0"/>
           </a:p>
@@ -4962,7 +4961,7 @@
           <a:p>
             <a:r>
               <a:rPr lang="en-US" dirty="0"/>
-              <a:t>For your homework: Define advection. We shall correct it at the beginning of our next lesson.</a:t>
+              <a:t>Our next lesson will be on Lesson 5: Heat Transport. Thank you for your attention, and see you next time.</a:t>
             </a:r>
             <a:endParaRPr lang="en-US" dirty="0"/>
           </a:p>
@@ -5050,7 +5049,7 @@
           <a:p>
             <a:r>
               <a:rPr lang="en-US" dirty="0"/>
-              <a:t>Our next lesson will be on Lesson 5: Heat Transport. Thank you for your attention, and see you next time.</a:t>
+              <a:t>Let us play the bilingual game. I say a word in English, and you give me the French word. Then we do the reverse.</a:t>
             </a:r>
             <a:endParaRPr lang="en-US" dirty="0"/>
           </a:p>
@@ -5138,7 +5137,7 @@
           <a:p>
             <a:r>
               <a:rPr lang="en-US" dirty="0"/>
-              <a:t>Let us play the bilingual game. I say a word in English, and you give me the French word. Then we do the reverse.</a:t>
+              <a:t>I record this information in the official logbook of the class after the lesson.</a:t>
             </a:r>
             <a:endParaRPr lang="en-US" dirty="0"/>
           </a:p>
@@ -5226,7 +5225,7 @@
           <a:p>
             <a:r>
               <a:rPr lang="en-US" dirty="0"/>
-              <a:t>I record this information in the official logbook of the class after the lesson.</a:t>
+              <a:t>I complete the second page of the logbook: the matter taught, the evaluation, the homework and the attendance.</a:t>
             </a:r>
             <a:endParaRPr lang="en-US" dirty="0"/>
           </a:p>
@@ -5314,7 +5313,7 @@
           <a:p>
             <a:r>
               <a:rPr lang="en-US" dirty="0"/>
-              <a:t>I complete the second page of the logbook: the matter taught, the evaluation, the homework and the attendance.</a:t>
+              <a:t>This slide is for me, the teacher: it gives the timing of the lesson and what to do if the projector is not available.</a:t>
             </a:r>
             <a:endParaRPr lang="en-US" dirty="0"/>
           </a:p>
@@ -5490,7 +5489,7 @@
           <a:p>
             <a:r>
               <a:rPr lang="en-US" dirty="0"/>
-              <a:t>This slide is for me, the teacher: it gives the timing of the lesson and what to do if the projector is not available.</a:t>
+              <a:t>These are the references and picture credits used to prepare this lesson.</a:t>
             </a:r>
             <a:endParaRPr lang="en-US" dirty="0"/>
           </a:p>
@@ -5514,94 +5513,6 @@
             <a:fld id="{F7021451-1387-4CA6-816F-3879F97B5CBC}" type="slidenum">
               <a:rPr lang="en-US"/>
               <a:t>60</a:t>
-            </a:fld>
-            <a:endParaRPr lang="en-US"/>
-          </a:p>
-        </p:txBody>
-      </p:sp>
-    </p:spTree>
-    <p:extLst>
-      <p:ext uri="{BB962C8B-B14F-4D97-AF65-F5344CB8AC3E}">
-        <p14:creationId xmlns:p14="http://schemas.microsoft.com/office/powerpoint/2010/main" val="1024086991"/>
-      </p:ext>
-    </p:extLst>
-  </p:cSld>
-  <p:clrMapOvr>
-    <a:masterClrMapping/>
-  </p:clrMapOvr>
-</p:notes>
-</file>
-
-<file path=ppt/notesSlides/notesSlide61.xml><?xml version="1.0" encoding="utf-8"?>
-<p:notes xmlns:a="http://schemas.openxmlformats.org/drawingml/2006/main" xmlns:r="http://schemas.openxmlformats.org/officeDocument/2006/relationships" xmlns:p="http://schemas.openxmlformats.org/presentationml/2006/main">
-  <p:cSld>
-    <p:spTree>
-      <p:nvGrpSpPr>
-        <p:cNvPr id="1" name=""/>
-        <p:cNvGrpSpPr/>
-        <p:nvPr/>
-      </p:nvGrpSpPr>
-      <p:grpSpPr>
-        <a:xfrm>
-          <a:off x="0" y="0"/>
-          <a:ext cx="0" cy="0"/>
-          <a:chOff x="0" y="0"/>
-          <a:chExt cx="0" cy="0"/>
-        </a:xfrm>
-      </p:grpSpPr>
-      <p:sp>
-        <p:nvSpPr>
-          <p:cNvPr id="2" name="Slide Image Placeholder 1"/>
-          <p:cNvSpPr>
-            <a:spLocks noGrp="1" noRot="1" noChangeAspect="1"/>
-          </p:cNvSpPr>
-          <p:nvPr>
-            <p:ph type="sldImg"/>
-          </p:nvPr>
-        </p:nvSpPr>
-        <p:spPr/>
-      </p:sp>
-      <p:sp>
-        <p:nvSpPr>
-          <p:cNvPr id="3" name="Notes Placeholder 2"/>
-          <p:cNvSpPr>
-            <a:spLocks noGrp="1"/>
-          </p:cNvSpPr>
-          <p:nvPr>
-            <p:ph type="body" idx="1"/>
-          </p:nvPr>
-        </p:nvSpPr>
-        <p:spPr/>
-        <p:txBody>
-          <a:bodyPr/>
-          <a:lstStyle/>
-          <a:p>
-            <a:r>
-              <a:rPr lang="en-US" dirty="0"/>
-              <a:t>These are the references and picture credits used to prepare this lesson.</a:t>
-            </a:r>
-            <a:endParaRPr lang="en-US" dirty="0"/>
-          </a:p>
-        </p:txBody>
-      </p:sp>
-      <p:sp>
-        <p:nvSpPr>
-          <p:cNvPr id="4" name="Slide Number Placeholder 3"/>
-          <p:cNvSpPr>
-            <a:spLocks noGrp="1"/>
-          </p:cNvSpPr>
-          <p:nvPr>
-            <p:ph type="sldNum" sz="quarter" idx="10"/>
-          </p:nvPr>
-        </p:nvSpPr>
-        <p:spPr/>
-        <p:txBody>
-          <a:bodyPr/>
-          <a:lstStyle/>
-          <a:p>
-            <a:fld id="{F7021451-1387-4CA6-816F-3879F97B5CBC}" type="slidenum">
-              <a:rPr lang="en-US"/>
-              <a:t>61</a:t>
             </a:fld>
             <a:endParaRPr lang="en-US"/>
           </a:p>
@@ -14932,7 +14843,7 @@
                 <a:ea typeface="Times New Roman" pitchFamily="34" charset="-122"/>
                 <a:cs typeface="Times New Roman" pitchFamily="34" charset="-120"/>
               </a:rPr>
-              <a:t>Energy surplus: </a:t>
+              <a:t>Positive balance (surplus): </a:t>
             </a:r>
             <a:pPr algn="l" indent="0" marL="0">
               <a:spcAft>
@@ -14969,7 +14880,7 @@
                 <a:ea typeface="Times New Roman" pitchFamily="34" charset="-122"/>
                 <a:cs typeface="Times New Roman" pitchFamily="34" charset="-120"/>
               </a:rPr>
-              <a:t>Energy deficit: </a:t>
+              <a:t>Negative balance (deficit): </a:t>
             </a:r>
             <a:pPr algn="l" indent="0" marL="0">
               <a:spcAft>
@@ -15139,7 +15050,7 @@
                 <a:ea typeface="Times New Roman" pitchFamily="34" charset="-122"/>
                 <a:cs typeface="Times New Roman" pitchFamily="34" charset="-120"/>
               </a:rPr>
-              <a:t>1. The Global Heat Budget</a:t>
+              <a:t>1. The Global Radiation Balance</a:t>
             </a:r>
             <a:endParaRPr lang="en-US" sz="3600" dirty="0"/>
           </a:p>
@@ -15154,7 +15065,7 @@
         <p:spPr>
           <a:xfrm>
             <a:off x="365760" y="1783080"/>
-            <a:ext cx="4846320" cy="4617720"/>
+            <a:ext cx="6035040" cy="4617720"/>
           </a:xfrm>
           <a:prstGeom prst="rect">
             <a:avLst/>
@@ -15173,7 +15084,7 @@
               <a:buNone/>
             </a:pPr>
             <a:r>
-              <a:rPr lang="en-US" sz="3400" i="1" dirty="0">
+              <a:rPr lang="en-US" sz="3000" i="1" dirty="0">
                 <a:solidFill>
                   <a:srgbClr val="111111"/>
                 </a:solidFill>
@@ -15181,9 +15092,9 @@
                 <a:ea typeface="Times New Roman" pitchFamily="34" charset="-122"/>
                 <a:cs typeface="Times New Roman" pitchFamily="34" charset="-120"/>
               </a:rPr>
-              <a:t>The global heat budget is presented as follows:</a:t>
-            </a:r>
-            <a:endParaRPr lang="en-US" sz="3400" dirty="0"/>
+              <a:t>The Earth as a whole has the following radiation balance:</a:t>
+            </a:r>
+            <a:endParaRPr lang="en-US" sz="3000" dirty="0"/>
           </a:p>
           <a:p>
             <a:pPr algn="l" indent="0" marL="0">
@@ -15193,7 +15104,7 @@
               <a:buNone/>
             </a:pPr>
             <a:r>
-              <a:rPr lang="en-US" sz="3400" b="1" dirty="0">
+              <a:rPr lang="en-US" sz="3000" b="1" dirty="0">
                 <a:solidFill>
                   <a:srgbClr val="111111"/>
                 </a:solidFill>
@@ -15210,7 +15121,7 @@
               <a:buNone/>
             </a:pPr>
             <a:r>
-              <a:rPr lang="en-US" sz="3400" dirty="0">
+              <a:rPr lang="en-US" sz="3000" dirty="0">
                 <a:solidFill>
                   <a:srgbClr val="111111"/>
                 </a:solidFill>
@@ -15218,9 +15129,9 @@
                 <a:ea typeface="Times New Roman" pitchFamily="34" charset="-122"/>
                 <a:cs typeface="Times New Roman" pitchFamily="34" charset="-120"/>
               </a:rPr>
-              <a:t>The energy received from the Sun equals the energy sent back, so the average temperature of the Earth stays stable.</a:t>
-            </a:r>
-            <a:endParaRPr lang="en-US" sz="3400" dirty="0"/>
+              <a:t>Over a year, the energy the Earth receives from the Sun equals the energy it sends back to space as terrestrial radiation. This is why the average temperature of the Earth stays stable, at about 15 °C.</a:t>
+            </a:r>
+            <a:endParaRPr lang="en-US" sz="3000" dirty="0"/>
           </a:p>
         </p:txBody>
       </p:sp>
@@ -15240,8 +15151,8 @@
         </p:blipFill>
         <p:spPr>
           <a:xfrm>
-            <a:off x="5349240" y="2461422"/>
-            <a:ext cx="6659575" cy="2913564"/>
+            <a:off x="6537960" y="2721454"/>
+            <a:ext cx="5470855" cy="2393499"/>
           </a:xfrm>
           <a:prstGeom prst="rect">
             <a:avLst/>
@@ -15256,8 +15167,8 @@
         </p:nvSpPr>
         <p:spPr>
           <a:xfrm>
-            <a:off x="5349240" y="6089904"/>
-            <a:ext cx="6659575" cy="347472"/>
+            <a:off x="6537960" y="6089904"/>
+            <a:ext cx="5470855" cy="347472"/>
           </a:xfrm>
           <a:prstGeom prst="rect">
             <a:avLst/>
@@ -15434,7 +15345,7 @@
                 <a:ea typeface="Times New Roman" pitchFamily="34" charset="-122"/>
                 <a:cs typeface="Times New Roman" pitchFamily="34" charset="-120"/>
               </a:rPr>
-              <a:t>1. The Global Heat Budget</a:t>
+              <a:t>1. The Global Radiation Balance</a:t>
             </a:r>
             <a:endParaRPr lang="en-US" sz="3600" dirty="0"/>
           </a:p>
@@ -15449,7 +15360,7 @@
         <p:spPr>
           <a:xfrm>
             <a:off x="365760" y="1783080"/>
-            <a:ext cx="4846320" cy="4617720"/>
+            <a:ext cx="6035040" cy="4617720"/>
           </a:xfrm>
           <a:prstGeom prst="rect">
             <a:avLst/>
@@ -15476,7 +15387,7 @@
                 <a:ea typeface="Times New Roman" pitchFamily="34" charset="-122"/>
                 <a:cs typeface="Times New Roman" pitchFamily="34" charset="-120"/>
               </a:rPr>
-              <a:t>Greenhouse effect: </a:t>
+              <a:t>The greenhouse effect: </a:t>
             </a:r>
             <a:pPr algn="l" indent="0" marL="0">
               <a:spcAft>
@@ -15493,7 +15404,7 @@
                 <a:ea typeface="Times New Roman" pitchFamily="34" charset="-122"/>
                 <a:cs typeface="Times New Roman" pitchFamily="34" charset="-120"/>
               </a:rPr>
-              <a:t>Water vapour and carbon dioxide trap part of the terrestrial radiation, keeping the Earth about 33 °C warmer.</a:t>
+              <a:t>Water vapour, carbon dioxide and methane absorb part of the terrestrial radiation and send it back to the ground. They keep the Earth about 33 °C warmer than it would be without an atmosphere.</a:t>
             </a:r>
             <a:endParaRPr lang="en-US" sz="3600" dirty="0"/>
           </a:p>
@@ -15515,8 +15426,8 @@
         </p:blipFill>
         <p:spPr>
           <a:xfrm>
-            <a:off x="5349240" y="2617506"/>
-            <a:ext cx="6659575" cy="2601397"/>
+            <a:off x="6537960" y="2849678"/>
+            <a:ext cx="5470855" cy="2137053"/>
           </a:xfrm>
           <a:prstGeom prst="rect">
             <a:avLst/>
@@ -15531,8 +15442,8 @@
         </p:nvSpPr>
         <p:spPr>
           <a:xfrm>
-            <a:off x="5349240" y="6089904"/>
-            <a:ext cx="6659575" cy="347472"/>
+            <a:off x="6537960" y="6089904"/>
+            <a:ext cx="5470855" cy="347472"/>
           </a:xfrm>
           <a:prstGeom prst="rect">
             <a:avLst/>
@@ -15913,9 +15824,129 @@
           </a:p>
         </p:txBody>
       </p:sp>
+      <p:sp>
+        <p:nvSpPr>
+          <p:cNvPr id="3" name="Text 1"/>
+          <p:cNvSpPr/>
+          <p:nvPr/>
+        </p:nvSpPr>
+        <p:spPr>
+          <a:xfrm>
+            <a:off x="365760" y="1005840"/>
+            <a:ext cx="11460175" cy="731520"/>
+          </a:xfrm>
+          <a:prstGeom prst="rect">
+            <a:avLst/>
+          </a:prstGeom>
+          <a:noFill/>
+          <a:ln/>
+        </p:spPr>
+        <p:txBody>
+          <a:bodyPr wrap="square" lIns="0" tIns="0" rIns="0" bIns="0" rtlCol="0" anchor="ctr">
+            <a:normAutofit/>
+          </a:bodyPr>
+          <a:lstStyle/>
+          <a:p>
+            <a:pPr algn="ctr" indent="0" marL="0">
+              <a:buNone/>
+            </a:pPr>
+            <a:r>
+              <a:rPr lang="en-US" sz="3600" b="1" dirty="0">
+                <a:solidFill>
+                  <a:srgbClr val="990011"/>
+                </a:solidFill>
+                <a:latin typeface="Times New Roman" pitchFamily="34" charset="0"/>
+                <a:ea typeface="Times New Roman" pitchFamily="34" charset="-122"/>
+                <a:cs typeface="Times New Roman" pitchFamily="34" charset="-120"/>
+              </a:rPr>
+              <a:t>2. Zones of Positive and Negative Balance</a:t>
+            </a:r>
+            <a:endParaRPr lang="en-US" sz="3600" dirty="0"/>
+          </a:p>
+        </p:txBody>
+      </p:sp>
+      <p:sp>
+        <p:nvSpPr>
+          <p:cNvPr id="4" name="Text 2"/>
+          <p:cNvSpPr/>
+          <p:nvPr/>
+        </p:nvSpPr>
+        <p:spPr>
+          <a:xfrm>
+            <a:off x="365760" y="1783080"/>
+            <a:ext cx="6035040" cy="4617720"/>
+          </a:xfrm>
+          <a:prstGeom prst="rect">
+            <a:avLst/>
+          </a:prstGeom>
+          <a:noFill/>
+          <a:ln/>
+        </p:spPr>
+        <p:txBody>
+          <a:bodyPr wrap="square" lIns="0" tIns="0" rIns="0" bIns="0" rtlCol="0" anchor="t"/>
+          <a:lstStyle/>
+          <a:p>
+            <a:pPr algn="l" indent="0" marL="0">
+              <a:spcAft>
+                <a:spcPts val="800"/>
+              </a:spcAft>
+              <a:buNone/>
+            </a:pPr>
+            <a:r>
+              <a:rPr lang="en-US" sz="3000" i="1" dirty="0">
+                <a:solidFill>
+                  <a:srgbClr val="111111"/>
+                </a:solidFill>
+                <a:latin typeface="Times New Roman" pitchFamily="34" charset="0"/>
+                <a:ea typeface="Times New Roman" pitchFamily="34" charset="-122"/>
+                <a:cs typeface="Times New Roman" pitchFamily="34" charset="-120"/>
+              </a:rPr>
+              <a:t>The balance differs between the following latitudinal zones:</a:t>
+            </a:r>
+            <a:endParaRPr lang="en-US" sz="3000" dirty="0"/>
+          </a:p>
+          <a:p>
+            <a:pPr algn="l" indent="0" marL="0">
+              <a:spcAft>
+                <a:spcPts val="800"/>
+              </a:spcAft>
+              <a:buNone/>
+            </a:pPr>
+            <a:r>
+              <a:rPr lang="en-US" sz="3000" b="1" dirty="0">
+                <a:solidFill>
+                  <a:srgbClr val="111111"/>
+                </a:solidFill>
+                <a:latin typeface="Times New Roman" pitchFamily="34" charset="0"/>
+                <a:ea typeface="Times New Roman" pitchFamily="34" charset="-122"/>
+                <a:cs typeface="Times New Roman" pitchFamily="34" charset="-120"/>
+              </a:rPr>
+              <a:t>The inter-tropical zone (positive balance): </a:t>
+            </a:r>
+            <a:pPr algn="l" indent="0" marL="0">
+              <a:spcAft>
+                <a:spcPts val="800"/>
+              </a:spcAft>
+              <a:buNone/>
+            </a:pPr>
+            <a:r>
+              <a:rPr lang="en-US" sz="3000" dirty="0">
+                <a:solidFill>
+                  <a:srgbClr val="111111"/>
+                </a:solidFill>
+                <a:latin typeface="Times New Roman" pitchFamily="34" charset="0"/>
+                <a:ea typeface="Times New Roman" pitchFamily="34" charset="-122"/>
+                <a:cs typeface="Times New Roman" pitchFamily="34" charset="-120"/>
+              </a:rPr>
+              <a:t>Between about 35 to 40° N and S, incoming solar radiation is greater than outgoing radiation. These latitudes, which include all of Cameroon, have an energy surplus and are warm all year.</a:t>
+            </a:r>
+            <a:endParaRPr lang="en-US" sz="3000" dirty="0"/>
+          </a:p>
+        </p:txBody>
+      </p:sp>
       <p:pic>
         <p:nvPicPr>
-          <p:cNvPr id="3" name="Image 0" descr="/home/claude/f4/img/minesec_sheet.png">    </p:cNvPr>
+          <p:cNvPr id="5" name="Image 0" descr="/home/claude/f4/img/v2/met2_surplus.png">    </p:cNvPr>
           <p:cNvPicPr>
             <a:picLocks noChangeAspect="1"/>
           </p:cNvPicPr>
@@ -15929,8 +15960,8 @@
         </p:blipFill>
         <p:spPr>
           <a:xfrm>
-            <a:off x="0" y="658368"/>
-            <a:ext cx="5120640" cy="5833872"/>
+            <a:off x="6537960" y="2721454"/>
+            <a:ext cx="5470855" cy="2393499"/>
           </a:xfrm>
           <a:prstGeom prst="rect">
             <a:avLst/>
@@ -15939,14 +15970,14 @@
       </p:pic>
       <p:sp>
         <p:nvSpPr>
-          <p:cNvPr id="4" name="Text 1"/>
+          <p:cNvPr id="6" name="Text 3"/>
           <p:cNvSpPr/>
           <p:nvPr/>
         </p:nvSpPr>
         <p:spPr>
           <a:xfrm>
-            <a:off x="5349240" y="1005840"/>
-            <a:ext cx="6522415" cy="731520"/>
+            <a:off x="6537960" y="6089904"/>
+            <a:ext cx="5470855" cy="347472"/>
           </a:xfrm>
           <a:prstGeom prst="rect">
             <a:avLst/>
@@ -15955,85 +15986,24 @@
           <a:ln/>
         </p:spPr>
         <p:txBody>
-          <a:bodyPr wrap="square" lIns="0" tIns="0" rIns="0" bIns="0" rtlCol="0" anchor="ctr">
-            <a:normAutofit/>
-          </a:bodyPr>
+          <a:bodyPr wrap="square" lIns="0" tIns="0" rIns="0" bIns="0" rtlCol="0" anchor="ctr"/>
           <a:lstStyle/>
           <a:p>
             <a:pPr algn="ctr" indent="0" marL="0">
               <a:buNone/>
             </a:pPr>
             <a:r>
-              <a:rPr lang="en-US" sz="3600" b="1" dirty="0">
-                <a:solidFill>
-                  <a:srgbClr val="990011"/>
+              <a:rPr lang="en-US" sz="1600" i="1" dirty="0">
+                <a:solidFill>
+                  <a:srgbClr val="555555"/>
                 </a:solidFill>
                 <a:latin typeface="Times New Roman" pitchFamily="34" charset="0"/>
                 <a:ea typeface="Times New Roman" pitchFamily="34" charset="-122"/>
                 <a:cs typeface="Times New Roman" pitchFamily="34" charset="-120"/>
               </a:rPr>
-              <a:t>1. The Global Heat Budget</a:t>
-            </a:r>
-            <a:endParaRPr lang="en-US" sz="3600" dirty="0"/>
-          </a:p>
-        </p:txBody>
-      </p:sp>
-      <p:sp>
-        <p:nvSpPr>
-          <p:cNvPr id="5" name="Text 2"/>
-          <p:cNvSpPr/>
-          <p:nvPr/>
-        </p:nvSpPr>
-        <p:spPr>
-          <a:xfrm>
-            <a:off x="5349240" y="1783080"/>
-            <a:ext cx="6522415" cy="4663440"/>
-          </a:xfrm>
-          <a:prstGeom prst="rect">
-            <a:avLst/>
-          </a:prstGeom>
-          <a:noFill/>
-          <a:ln/>
-        </p:spPr>
-        <p:txBody>
-          <a:bodyPr wrap="square" lIns="0" tIns="0" rIns="0" bIns="0" rtlCol="0" anchor="t"/>
-          <a:lstStyle/>
-          <a:p>
-            <a:pPr algn="l" indent="0" marL="0">
-              <a:spcAft>
-                <a:spcPts val="800"/>
-              </a:spcAft>
-              <a:buNone/>
-            </a:pPr>
-            <a:r>
-              <a:rPr lang="en-US" sz="4000" b="1" dirty="0">
-                <a:solidFill>
-                  <a:srgbClr val="111111"/>
-                </a:solidFill>
-                <a:latin typeface="Times New Roman" pitchFamily="34" charset="0"/>
-                <a:ea typeface="Times New Roman" pitchFamily="34" charset="-122"/>
-                <a:cs typeface="Times New Roman" pitchFamily="34" charset="-120"/>
-              </a:rPr>
-              <a:t>Unequal by latitude: </a:t>
-            </a:r>
-            <a:pPr algn="l" indent="0" marL="0">
-              <a:spcAft>
-                <a:spcPts val="800"/>
-              </a:spcAft>
-              <a:buNone/>
-            </a:pPr>
-            <a:r>
-              <a:rPr lang="en-US" sz="4000" dirty="0">
-                <a:solidFill>
-                  <a:srgbClr val="111111"/>
-                </a:solidFill>
-                <a:latin typeface="Times New Roman" pitchFamily="34" charset="0"/>
-                <a:ea typeface="Times New Roman" pitchFamily="34" charset="-122"/>
-                <a:cs typeface="Times New Roman" pitchFamily="34" charset="-120"/>
-              </a:rPr>
-              <a:t>The balance is not the same at every latitude.</a:t>
-            </a:r>
-            <a:endParaRPr lang="en-US" sz="4000" dirty="0"/>
+              <a:t>Illustration: zones of surplus and deficit</a:t>
+            </a:r>
+            <a:endParaRPr lang="en-US" sz="1600" dirty="0"/>
           </a:p>
         </p:txBody>
       </p:sp>
@@ -16149,129 +16119,9 @@
           </a:p>
         </p:txBody>
       </p:sp>
-      <p:sp>
-        <p:nvSpPr>
-          <p:cNvPr id="3" name="Text 1"/>
-          <p:cNvSpPr/>
-          <p:nvPr/>
-        </p:nvSpPr>
-        <p:spPr>
-          <a:xfrm>
-            <a:off x="365760" y="1005840"/>
-            <a:ext cx="11460175" cy="731520"/>
-          </a:xfrm>
-          <a:prstGeom prst="rect">
-            <a:avLst/>
-          </a:prstGeom>
-          <a:noFill/>
-          <a:ln/>
-        </p:spPr>
-        <p:txBody>
-          <a:bodyPr wrap="square" lIns="0" tIns="0" rIns="0" bIns="0" rtlCol="0" anchor="ctr">
-            <a:normAutofit/>
-          </a:bodyPr>
-          <a:lstStyle/>
-          <a:p>
-            <a:pPr algn="ctr" indent="0" marL="0">
-              <a:buNone/>
-            </a:pPr>
-            <a:r>
-              <a:rPr lang="en-US" sz="3600" b="1" dirty="0">
-                <a:solidFill>
-                  <a:srgbClr val="990011"/>
-                </a:solidFill>
-                <a:latin typeface="Times New Roman" pitchFamily="34" charset="0"/>
-                <a:ea typeface="Times New Roman" pitchFamily="34" charset="-122"/>
-                <a:cs typeface="Times New Roman" pitchFamily="34" charset="-120"/>
-              </a:rPr>
-              <a:t>2. The Latitudinal Heat Imbalance</a:t>
-            </a:r>
-            <a:endParaRPr lang="en-US" sz="3600" dirty="0"/>
-          </a:p>
-        </p:txBody>
-      </p:sp>
-      <p:sp>
-        <p:nvSpPr>
-          <p:cNvPr id="4" name="Text 2"/>
-          <p:cNvSpPr/>
-          <p:nvPr/>
-        </p:nvSpPr>
-        <p:spPr>
-          <a:xfrm>
-            <a:off x="365760" y="1783080"/>
-            <a:ext cx="4846320" cy="4617720"/>
-          </a:xfrm>
-          <a:prstGeom prst="rect">
-            <a:avLst/>
-          </a:prstGeom>
-          <a:noFill/>
-          <a:ln/>
-        </p:spPr>
-        <p:txBody>
-          <a:bodyPr wrap="square" lIns="0" tIns="0" rIns="0" bIns="0" rtlCol="0" anchor="t"/>
-          <a:lstStyle/>
-          <a:p>
-            <a:pPr algn="l" indent="0" marL="0">
-              <a:spcAft>
-                <a:spcPts val="800"/>
-              </a:spcAft>
-              <a:buNone/>
-            </a:pPr>
-            <a:r>
-              <a:rPr lang="en-US" sz="3200" i="1" dirty="0">
-                <a:solidFill>
-                  <a:srgbClr val="111111"/>
-                </a:solidFill>
-                <a:latin typeface="Times New Roman" pitchFamily="34" charset="0"/>
-                <a:ea typeface="Times New Roman" pitchFamily="34" charset="-122"/>
-                <a:cs typeface="Times New Roman" pitchFamily="34" charset="-120"/>
-              </a:rPr>
-              <a:t>The zones of surplus and deficit are the following:</a:t>
-            </a:r>
-            <a:endParaRPr lang="en-US" sz="3200" dirty="0"/>
-          </a:p>
-          <a:p>
-            <a:pPr algn="l" indent="0" marL="0">
-              <a:spcAft>
-                <a:spcPts val="800"/>
-              </a:spcAft>
-              <a:buNone/>
-            </a:pPr>
-            <a:r>
-              <a:rPr lang="en-US" sz="3200" b="1" dirty="0">
-                <a:solidFill>
-                  <a:srgbClr val="111111"/>
-                </a:solidFill>
-                <a:latin typeface="Times New Roman" pitchFamily="34" charset="0"/>
-                <a:ea typeface="Times New Roman" pitchFamily="34" charset="-122"/>
-                <a:cs typeface="Times New Roman" pitchFamily="34" charset="-120"/>
-              </a:rPr>
-              <a:t>Zone of surplus: </a:t>
-            </a:r>
-            <a:pPr algn="l" indent="0" marL="0">
-              <a:spcAft>
-                <a:spcPts val="800"/>
-              </a:spcAft>
-              <a:buNone/>
-            </a:pPr>
-            <a:r>
-              <a:rPr lang="en-US" sz="3200" dirty="0">
-                <a:solidFill>
-                  <a:srgbClr val="111111"/>
-                </a:solidFill>
-                <a:latin typeface="Times New Roman" pitchFamily="34" charset="0"/>
-                <a:ea typeface="Times New Roman" pitchFamily="34" charset="-122"/>
-                <a:cs typeface="Times New Roman" pitchFamily="34" charset="-120"/>
-              </a:rPr>
-              <a:t>Between about 35–40° N and S, incoming radiation exceeds outgoing radiation, as in all of Cameroon.</a:t>
-            </a:r>
-            <a:endParaRPr lang="en-US" sz="3200" dirty="0"/>
-          </a:p>
-        </p:txBody>
-      </p:sp>
       <p:pic>
         <p:nvPicPr>
-          <p:cNvPr id="5" name="Image 0" descr="/home/claude/f4/img/v2/met2_surplus.png">    </p:cNvPr>
+          <p:cNvPr id="3" name="Image 0" descr="/home/claude/f4/img/minesec_sheet.png">    </p:cNvPr>
           <p:cNvPicPr>
             <a:picLocks noChangeAspect="1"/>
           </p:cNvPicPr>
@@ -16285,8 +16135,8 @@
         </p:blipFill>
         <p:spPr>
           <a:xfrm>
-            <a:off x="5349240" y="2461422"/>
-            <a:ext cx="6659575" cy="2913564"/>
+            <a:off x="0" y="658368"/>
+            <a:ext cx="3840480" cy="5833872"/>
           </a:xfrm>
           <a:prstGeom prst="rect">
             <a:avLst/>
@@ -16295,14 +16145,14 @@
       </p:pic>
       <p:sp>
         <p:nvSpPr>
-          <p:cNvPr id="6" name="Text 3"/>
+          <p:cNvPr id="4" name="Text 1"/>
           <p:cNvSpPr/>
           <p:nvPr/>
         </p:nvSpPr>
         <p:spPr>
           <a:xfrm>
-            <a:off x="5349240" y="6089904"/>
-            <a:ext cx="6659575" cy="347472"/>
+            <a:off x="4069080" y="1005840"/>
+            <a:ext cx="7802575" cy="731520"/>
           </a:xfrm>
           <a:prstGeom prst="rect">
             <a:avLst/>
@@ -16311,24 +16161,85 @@
           <a:ln/>
         </p:spPr>
         <p:txBody>
-          <a:bodyPr wrap="square" lIns="0" tIns="0" rIns="0" bIns="0" rtlCol="0" anchor="ctr"/>
+          <a:bodyPr wrap="square" lIns="0" tIns="0" rIns="0" bIns="0" rtlCol="0" anchor="ctr">
+            <a:normAutofit/>
+          </a:bodyPr>
           <a:lstStyle/>
           <a:p>
             <a:pPr algn="ctr" indent="0" marL="0">
               <a:buNone/>
             </a:pPr>
             <a:r>
-              <a:rPr lang="en-US" sz="1600" i="1" dirty="0">
-                <a:solidFill>
-                  <a:srgbClr val="555555"/>
+              <a:rPr lang="en-US" sz="3600" b="1" dirty="0">
+                <a:solidFill>
+                  <a:srgbClr val="990011"/>
                 </a:solidFill>
                 <a:latin typeface="Times New Roman" pitchFamily="34" charset="0"/>
                 <a:ea typeface="Times New Roman" pitchFamily="34" charset="-122"/>
                 <a:cs typeface="Times New Roman" pitchFamily="34" charset="-120"/>
               </a:rPr>
-              <a:t>Illustration: surplus and deficit</a:t>
-            </a:r>
-            <a:endParaRPr lang="en-US" sz="1600" dirty="0"/>
+              <a:t>2. Zones of Positive and Negative Balance</a:t>
+            </a:r>
+            <a:endParaRPr lang="en-US" sz="3600" dirty="0"/>
+          </a:p>
+        </p:txBody>
+      </p:sp>
+      <p:sp>
+        <p:nvSpPr>
+          <p:cNvPr id="5" name="Text 2"/>
+          <p:cNvSpPr/>
+          <p:nvPr/>
+        </p:nvSpPr>
+        <p:spPr>
+          <a:xfrm>
+            <a:off x="4069080" y="1783080"/>
+            <a:ext cx="7802575" cy="4663440"/>
+          </a:xfrm>
+          <a:prstGeom prst="rect">
+            <a:avLst/>
+          </a:prstGeom>
+          <a:noFill/>
+          <a:ln/>
+        </p:spPr>
+        <p:txBody>
+          <a:bodyPr wrap="square" lIns="0" tIns="0" rIns="0" bIns="0" rtlCol="0" anchor="t"/>
+          <a:lstStyle/>
+          <a:p>
+            <a:pPr algn="l" indent="0" marL="0">
+              <a:spcAft>
+                <a:spcPts val="800"/>
+              </a:spcAft>
+              <a:buNone/>
+            </a:pPr>
+            <a:r>
+              <a:rPr lang="en-US" sz="4000" b="1" dirty="0">
+                <a:solidFill>
+                  <a:srgbClr val="111111"/>
+                </a:solidFill>
+                <a:latin typeface="Times New Roman" pitchFamily="34" charset="0"/>
+                <a:ea typeface="Times New Roman" pitchFamily="34" charset="-122"/>
+                <a:cs typeface="Times New Roman" pitchFamily="34" charset="-120"/>
+              </a:rPr>
+              <a:t>Mid-latitudes and polar zones (negative balance): </a:t>
+            </a:r>
+            <a:pPr algn="l" indent="0" marL="0">
+              <a:spcAft>
+                <a:spcPts val="800"/>
+              </a:spcAft>
+              <a:buNone/>
+            </a:pPr>
+            <a:r>
+              <a:rPr lang="en-US" sz="4000" dirty="0">
+                <a:solidFill>
+                  <a:srgbClr val="111111"/>
+                </a:solidFill>
+                <a:latin typeface="Times New Roman" pitchFamily="34" charset="0"/>
+                <a:ea typeface="Times New Roman" pitchFamily="34" charset="-122"/>
+                <a:cs typeface="Times New Roman" pitchFamily="34" charset="-120"/>
+              </a:rPr>
+              <a:t>Towards the poles from about 35 to 40°, the Earth loses more radiation to space than it receives. These regions have an energy deficit, so they are cool or cold.</a:t>
+            </a:r>
+            <a:endParaRPr lang="en-US" sz="4000" dirty="0"/>
           </a:p>
         </p:txBody>
       </p:sp>
@@ -16444,9 +16355,129 @@
           </a:p>
         </p:txBody>
       </p:sp>
+      <p:sp>
+        <p:nvSpPr>
+          <p:cNvPr id="3" name="Text 1"/>
+          <p:cNvSpPr/>
+          <p:nvPr/>
+        </p:nvSpPr>
+        <p:spPr>
+          <a:xfrm>
+            <a:off x="365760" y="1005840"/>
+            <a:ext cx="11460175" cy="731520"/>
+          </a:xfrm>
+          <a:prstGeom prst="rect">
+            <a:avLst/>
+          </a:prstGeom>
+          <a:noFill/>
+          <a:ln/>
+        </p:spPr>
+        <p:txBody>
+          <a:bodyPr wrap="square" lIns="0" tIns="0" rIns="0" bIns="0" rtlCol="0" anchor="ctr">
+            <a:normAutofit/>
+          </a:bodyPr>
+          <a:lstStyle/>
+          <a:p>
+            <a:pPr algn="ctr" indent="0" marL="0">
+              <a:buNone/>
+            </a:pPr>
+            <a:r>
+              <a:rPr lang="en-US" sz="3600" b="1" dirty="0">
+                <a:solidFill>
+                  <a:srgbClr val="990011"/>
+                </a:solidFill>
+                <a:latin typeface="Times New Roman" pitchFamily="34" charset="0"/>
+                <a:ea typeface="Times New Roman" pitchFamily="34" charset="-122"/>
+                <a:cs typeface="Times New Roman" pitchFamily="34" charset="-120"/>
+              </a:rPr>
+              <a:t>3. Reasons for the Differences</a:t>
+            </a:r>
+            <a:endParaRPr lang="en-US" sz="3600" dirty="0"/>
+          </a:p>
+        </p:txBody>
+      </p:sp>
+      <p:sp>
+        <p:nvSpPr>
+          <p:cNvPr id="4" name="Text 2"/>
+          <p:cNvSpPr/>
+          <p:nvPr/>
+        </p:nvSpPr>
+        <p:spPr>
+          <a:xfrm>
+            <a:off x="365760" y="1783080"/>
+            <a:ext cx="6035040" cy="4617720"/>
+          </a:xfrm>
+          <a:prstGeom prst="rect">
+            <a:avLst/>
+          </a:prstGeom>
+          <a:noFill/>
+          <a:ln/>
+        </p:spPr>
+        <p:txBody>
+          <a:bodyPr wrap="square" lIns="0" tIns="0" rIns="0" bIns="0" rtlCol="0" anchor="t"/>
+          <a:lstStyle/>
+          <a:p>
+            <a:pPr algn="l" indent="0" marL="0">
+              <a:spcAft>
+                <a:spcPts val="800"/>
+              </a:spcAft>
+              <a:buNone/>
+            </a:pPr>
+            <a:r>
+              <a:rPr lang="en-US" sz="3200" i="1" dirty="0">
+                <a:solidFill>
+                  <a:srgbClr val="111111"/>
+                </a:solidFill>
+                <a:latin typeface="Times New Roman" pitchFamily="34" charset="0"/>
+                <a:ea typeface="Times New Roman" pitchFamily="34" charset="-122"/>
+                <a:cs typeface="Times New Roman" pitchFamily="34" charset="-120"/>
+              </a:rPr>
+              <a:t>The differences between the zones are explained by the following reasons:</a:t>
+            </a:r>
+            <a:endParaRPr lang="en-US" sz="3200" dirty="0"/>
+          </a:p>
+          <a:p>
+            <a:pPr algn="l" indent="0" marL="0">
+              <a:spcAft>
+                <a:spcPts val="800"/>
+              </a:spcAft>
+              <a:buNone/>
+            </a:pPr>
+            <a:r>
+              <a:rPr lang="en-US" sz="3200" b="1" dirty="0">
+                <a:solidFill>
+                  <a:srgbClr val="111111"/>
+                </a:solidFill>
+                <a:latin typeface="Times New Roman" pitchFamily="34" charset="0"/>
+                <a:ea typeface="Times New Roman" pitchFamily="34" charset="-122"/>
+                <a:cs typeface="Times New Roman" pitchFamily="34" charset="-120"/>
+              </a:rPr>
+              <a:t>Angle of incidence: </a:t>
+            </a:r>
+            <a:pPr algn="l" indent="0" marL="0">
+              <a:spcAft>
+                <a:spcPts val="800"/>
+              </a:spcAft>
+              <a:buNone/>
+            </a:pPr>
+            <a:r>
+              <a:rPr lang="en-US" sz="3200" dirty="0">
+                <a:solidFill>
+                  <a:srgbClr val="111111"/>
+                </a:solidFill>
+                <a:latin typeface="Times New Roman" pitchFamily="34" charset="0"/>
+                <a:ea typeface="Times New Roman" pitchFamily="34" charset="-122"/>
+                <a:cs typeface="Times New Roman" pitchFamily="34" charset="-120"/>
+              </a:rPr>
+              <a:t>Near the Equator the sun is high, so its energy is concentrated on a small area. Near the poles the rays are slanting and the same energy is spread over a much larger area.</a:t>
+            </a:r>
+            <a:endParaRPr lang="en-US" sz="3200" dirty="0"/>
+          </a:p>
+        </p:txBody>
+      </p:sp>
       <p:pic>
         <p:nvPicPr>
-          <p:cNvPr id="3" name="Image 0" descr="/home/claude/f4/img/minesec_sheet.png">    </p:cNvPr>
+          <p:cNvPr id="5" name="Image 0" descr="/home/claude/f4/img/v2/sun_rays_big.png">    </p:cNvPr>
           <p:cNvPicPr>
             <a:picLocks noChangeAspect="1"/>
           </p:cNvPicPr>
@@ -16460,8 +16491,8 @@
         </p:blipFill>
         <p:spPr>
           <a:xfrm>
-            <a:off x="0" y="658368"/>
-            <a:ext cx="5120640" cy="5833872"/>
+            <a:off x="6537960" y="2849678"/>
+            <a:ext cx="5470855" cy="2137053"/>
           </a:xfrm>
           <a:prstGeom prst="rect">
             <a:avLst/>
@@ -16470,14 +16501,14 @@
       </p:pic>
       <p:sp>
         <p:nvSpPr>
-          <p:cNvPr id="4" name="Text 1"/>
+          <p:cNvPr id="6" name="Text 3"/>
           <p:cNvSpPr/>
           <p:nvPr/>
         </p:nvSpPr>
         <p:spPr>
           <a:xfrm>
-            <a:off x="5349240" y="1005840"/>
-            <a:ext cx="6522415" cy="731520"/>
+            <a:off x="6537960" y="6089904"/>
+            <a:ext cx="5470855" cy="347472"/>
           </a:xfrm>
           <a:prstGeom prst="rect">
             <a:avLst/>
@@ -16486,85 +16517,24 @@
           <a:ln/>
         </p:spPr>
         <p:txBody>
-          <a:bodyPr wrap="square" lIns="0" tIns="0" rIns="0" bIns="0" rtlCol="0" anchor="ctr">
-            <a:normAutofit/>
-          </a:bodyPr>
+          <a:bodyPr wrap="square" lIns="0" tIns="0" rIns="0" bIns="0" rtlCol="0" anchor="ctr"/>
           <a:lstStyle/>
           <a:p>
             <a:pPr algn="ctr" indent="0" marL="0">
               <a:buNone/>
             </a:pPr>
             <a:r>
-              <a:rPr lang="en-US" sz="3600" b="1" dirty="0">
-                <a:solidFill>
-                  <a:srgbClr val="990011"/>
+              <a:rPr lang="en-US" sz="1600" i="1" dirty="0">
+                <a:solidFill>
+                  <a:srgbClr val="555555"/>
                 </a:solidFill>
                 <a:latin typeface="Times New Roman" pitchFamily="34" charset="0"/>
                 <a:ea typeface="Times New Roman" pitchFamily="34" charset="-122"/>
                 <a:cs typeface="Times New Roman" pitchFamily="34" charset="-120"/>
               </a:rPr>
-              <a:t>2. The Latitudinal Heat Imbalance</a:t>
-            </a:r>
-            <a:endParaRPr lang="en-US" sz="3600" dirty="0"/>
-          </a:p>
-        </p:txBody>
-      </p:sp>
-      <p:sp>
-        <p:nvSpPr>
-          <p:cNvPr id="5" name="Text 2"/>
-          <p:cNvSpPr/>
-          <p:nvPr/>
-        </p:nvSpPr>
-        <p:spPr>
-          <a:xfrm>
-            <a:off x="5349240" y="1783080"/>
-            <a:ext cx="6522415" cy="4663440"/>
-          </a:xfrm>
-          <a:prstGeom prst="rect">
-            <a:avLst/>
-          </a:prstGeom>
-          <a:noFill/>
-          <a:ln/>
-        </p:spPr>
-        <p:txBody>
-          <a:bodyPr wrap="square" lIns="0" tIns="0" rIns="0" bIns="0" rtlCol="0" anchor="t"/>
-          <a:lstStyle/>
-          <a:p>
-            <a:pPr algn="l" indent="0" marL="0">
-              <a:spcAft>
-                <a:spcPts val="800"/>
-              </a:spcAft>
-              <a:buNone/>
-            </a:pPr>
-            <a:r>
-              <a:rPr lang="en-US" sz="4000" b="1" dirty="0">
-                <a:solidFill>
-                  <a:srgbClr val="111111"/>
-                </a:solidFill>
-                <a:latin typeface="Times New Roman" pitchFamily="34" charset="0"/>
-                <a:ea typeface="Times New Roman" pitchFamily="34" charset="-122"/>
-                <a:cs typeface="Times New Roman" pitchFamily="34" charset="-120"/>
-              </a:rPr>
-              <a:t>Zones of deficit: </a:t>
-            </a:r>
-            <a:pPr algn="l" indent="0" marL="0">
-              <a:spcAft>
-                <a:spcPts val="800"/>
-              </a:spcAft>
-              <a:buNone/>
-            </a:pPr>
-            <a:r>
-              <a:rPr lang="en-US" sz="4000" dirty="0">
-                <a:solidFill>
-                  <a:srgbClr val="111111"/>
-                </a:solidFill>
-                <a:latin typeface="Times New Roman" pitchFamily="34" charset="0"/>
-                <a:ea typeface="Times New Roman" pitchFamily="34" charset="-122"/>
-                <a:cs typeface="Times New Roman" pitchFamily="34" charset="-120"/>
-              </a:rPr>
-              <a:t>Towards the poles from about 35–40°, outgoing radiation exceeds incoming radiation, so these regions are cold.</a:t>
-            </a:r>
-            <a:endParaRPr lang="en-US" sz="4000" dirty="0"/>
+              <a:t>Illustration: the angle of the sun rays</a:t>
+            </a:r>
+            <a:endParaRPr lang="en-US" sz="1600" dirty="0"/>
           </a:p>
         </p:txBody>
       </p:sp>
@@ -16715,7 +16685,7 @@
                 <a:ea typeface="Times New Roman" pitchFamily="34" charset="-122"/>
                 <a:cs typeface="Times New Roman" pitchFamily="34" charset="-120"/>
               </a:rPr>
-              <a:t>3. Reasons for the Imbalance</a:t>
+              <a:t>3. Reasons for the Differences</a:t>
             </a:r>
             <a:endParaRPr lang="en-US" sz="3600" dirty="0"/>
           </a:p>
@@ -16730,7 +16700,7 @@
         <p:spPr>
           <a:xfrm>
             <a:off x="365760" y="1783080"/>
-            <a:ext cx="4846320" cy="4617720"/>
+            <a:ext cx="6035040" cy="4617720"/>
           </a:xfrm>
           <a:prstGeom prst="rect">
             <a:avLst/>
@@ -16749,7 +16719,7 @@
               <a:buNone/>
             </a:pPr>
             <a:r>
-              <a:rPr lang="en-US" sz="3200" i="1" dirty="0">
+              <a:rPr lang="en-US" sz="3600" b="1" dirty="0">
                 <a:solidFill>
                   <a:srgbClr val="111111"/>
                 </a:solidFill>
@@ -16757,11 +16727,8 @@
                 <a:ea typeface="Times New Roman" pitchFamily="34" charset="-122"/>
                 <a:cs typeface="Times New Roman" pitchFamily="34" charset="-120"/>
               </a:rPr>
-              <a:t>The reasons for the latitudinal imbalance are the following:</a:t>
-            </a:r>
-            <a:endParaRPr lang="en-US" sz="3200" dirty="0"/>
-          </a:p>
-          <a:p>
+              <a:t>Thickness of atmosphere crossed: </a:t>
+            </a:r>
             <a:pPr algn="l" indent="0" marL="0">
               <a:spcAft>
                 <a:spcPts val="800"/>
@@ -16769,7 +16736,7 @@
               <a:buNone/>
             </a:pPr>
             <a:r>
-              <a:rPr lang="en-US" sz="3200" b="1" dirty="0">
+              <a:rPr lang="en-US" sz="3600" dirty="0">
                 <a:solidFill>
                   <a:srgbClr val="111111"/>
                 </a:solidFill>
@@ -16777,32 +16744,15 @@
                 <a:ea typeface="Times New Roman" pitchFamily="34" charset="-122"/>
                 <a:cs typeface="Times New Roman" pitchFamily="34" charset="-120"/>
               </a:rPr>
-              <a:t>Angle of incidence: </a:t>
-            </a:r>
-            <a:pPr algn="l" indent="0" marL="0">
-              <a:spcAft>
-                <a:spcPts val="800"/>
-              </a:spcAft>
-              <a:buNone/>
-            </a:pPr>
-            <a:r>
-              <a:rPr lang="en-US" sz="3200" dirty="0">
-                <a:solidFill>
-                  <a:srgbClr val="111111"/>
-                </a:solidFill>
-                <a:latin typeface="Times New Roman" pitchFamily="34" charset="0"/>
-                <a:ea typeface="Times New Roman" pitchFamily="34" charset="-122"/>
-                <a:cs typeface="Times New Roman" pitchFamily="34" charset="-120"/>
-              </a:rPr>
-              <a:t>Near the Equator the sun is high and energy is concentrated; near the poles it is low and energy is spread out.</a:t>
-            </a:r>
-            <a:endParaRPr lang="en-US" sz="3200" dirty="0"/>
+              <a:t>Slanting rays cross a thicker layer of air before reaching the ground. They therefore lose more energy by reflection, scattering and absorption.</a:t>
+            </a:r>
+            <a:endParaRPr lang="en-US" sz="3600" dirty="0"/>
           </a:p>
         </p:txBody>
       </p:sp>
       <p:pic>
         <p:nvPicPr>
-          <p:cNvPr id="5" name="Image 0" descr="/home/claude/f4/img/v2/sun_rays_big.png">    </p:cNvPr>
+          <p:cNvPr id="5" name="Image 0" descr="/home/claude/f4/img/v2/met2_imbalance.png">    </p:cNvPr>
           <p:cNvPicPr>
             <a:picLocks noChangeAspect="1"/>
           </p:cNvPicPr>
@@ -16816,8 +16766,8 @@
         </p:blipFill>
         <p:spPr>
           <a:xfrm>
-            <a:off x="5349240" y="2617506"/>
-            <a:ext cx="6659575" cy="2601397"/>
+            <a:off x="6537960" y="2849678"/>
+            <a:ext cx="5470855" cy="2137053"/>
           </a:xfrm>
           <a:prstGeom prst="rect">
             <a:avLst/>
@@ -16832,8 +16782,8 @@
         </p:nvSpPr>
         <p:spPr>
           <a:xfrm>
-            <a:off x="5349240" y="6089904"/>
-            <a:ext cx="6659575" cy="347472"/>
+            <a:off x="6537960" y="6089904"/>
+            <a:ext cx="5470855" cy="347472"/>
           </a:xfrm>
           <a:prstGeom prst="rect">
             <a:avLst/>
@@ -16857,7 +16807,7 @@
                 <a:ea typeface="Times New Roman" pitchFamily="34" charset="-122"/>
                 <a:cs typeface="Times New Roman" pitchFamily="34" charset="-120"/>
               </a:rPr>
-              <a:t>Illustration: direct and slanting rays</a:t>
+              <a:t>Illustration: the path of the rays</a:t>
             </a:r>
             <a:endParaRPr lang="en-US" sz="1600" dirty="0"/>
           </a:p>
@@ -17034,7 +16984,7 @@
                 <a:ea typeface="Times New Roman" pitchFamily="34" charset="-122"/>
                 <a:cs typeface="Times New Roman" pitchFamily="34" charset="-120"/>
               </a:rPr>
-              <a:t>3. Reasons for the Imbalance</a:t>
+              <a:t>3. Reasons for the Differences</a:t>
             </a:r>
             <a:endParaRPr lang="en-US" sz="3600" dirty="0"/>
           </a:p>
@@ -17093,7 +17043,7 @@
                 <a:ea typeface="Times New Roman" pitchFamily="34" charset="-122"/>
                 <a:cs typeface="Times New Roman" pitchFamily="34" charset="-120"/>
               </a:rPr>
-              <a:t>Ice and snow reflect much energy, while forests and oceans absorb it.</a:t>
+              <a:t>Ice and snow in polar regions reflect up to 85 % of the radiation they receive. Dark forests and oceans of the tropics absorb most of it and become warm.</a:t>
             </a:r>
             <a:endParaRPr lang="en-US" sz="4000" dirty="0"/>
           </a:p>
@@ -17211,109 +17161,9 @@
           </a:p>
         </p:txBody>
       </p:sp>
-      <p:sp>
-        <p:nvSpPr>
-          <p:cNvPr id="3" name="Text 1"/>
-          <p:cNvSpPr/>
-          <p:nvPr/>
-        </p:nvSpPr>
-        <p:spPr>
-          <a:xfrm>
-            <a:off x="365760" y="1005840"/>
-            <a:ext cx="11460175" cy="731520"/>
-          </a:xfrm>
-          <a:prstGeom prst="rect">
-            <a:avLst/>
-          </a:prstGeom>
-          <a:noFill/>
-          <a:ln/>
-        </p:spPr>
-        <p:txBody>
-          <a:bodyPr wrap="square" lIns="0" tIns="0" rIns="0" bIns="0" rtlCol="0" anchor="ctr">
-            <a:normAutofit/>
-          </a:bodyPr>
-          <a:lstStyle/>
-          <a:p>
-            <a:pPr algn="ctr" indent="0" marL="0">
-              <a:buNone/>
-            </a:pPr>
-            <a:r>
-              <a:rPr lang="en-US" sz="3600" b="1" dirty="0">
-                <a:solidFill>
-                  <a:srgbClr val="990011"/>
-                </a:solidFill>
-                <a:latin typeface="Times New Roman" pitchFamily="34" charset="0"/>
-                <a:ea typeface="Times New Roman" pitchFamily="34" charset="-122"/>
-                <a:cs typeface="Times New Roman" pitchFamily="34" charset="-120"/>
-              </a:rPr>
-              <a:t>3. Reasons for the Imbalance</a:t>
-            </a:r>
-            <a:endParaRPr lang="en-US" sz="3600" dirty="0"/>
-          </a:p>
-        </p:txBody>
-      </p:sp>
-      <p:sp>
-        <p:nvSpPr>
-          <p:cNvPr id="4" name="Text 2"/>
-          <p:cNvSpPr/>
-          <p:nvPr/>
-        </p:nvSpPr>
-        <p:spPr>
-          <a:xfrm>
-            <a:off x="365760" y="1783080"/>
-            <a:ext cx="4846320" cy="4617720"/>
-          </a:xfrm>
-          <a:prstGeom prst="rect">
-            <a:avLst/>
-          </a:prstGeom>
-          <a:noFill/>
-          <a:ln/>
-        </p:spPr>
-        <p:txBody>
-          <a:bodyPr wrap="square" lIns="0" tIns="0" rIns="0" bIns="0" rtlCol="0" anchor="t"/>
-          <a:lstStyle/>
-          <a:p>
-            <a:pPr algn="l" indent="0" marL="0">
-              <a:spcAft>
-                <a:spcPts val="800"/>
-              </a:spcAft>
-              <a:buNone/>
-            </a:pPr>
-            <a:r>
-              <a:rPr lang="en-US" sz="3600" b="1" dirty="0">
-                <a:solidFill>
-                  <a:srgbClr val="111111"/>
-                </a:solidFill>
-                <a:latin typeface="Times New Roman" pitchFamily="34" charset="0"/>
-                <a:ea typeface="Times New Roman" pitchFamily="34" charset="-122"/>
-                <a:cs typeface="Times New Roman" pitchFamily="34" charset="-120"/>
-              </a:rPr>
-              <a:t>Atmospheric path: </a:t>
-            </a:r>
-            <a:pPr algn="l" indent="0" marL="0">
-              <a:spcAft>
-                <a:spcPts val="800"/>
-              </a:spcAft>
-              <a:buNone/>
-            </a:pPr>
-            <a:r>
-              <a:rPr lang="en-US" sz="3600" dirty="0">
-                <a:solidFill>
-                  <a:srgbClr val="111111"/>
-                </a:solidFill>
-                <a:latin typeface="Times New Roman" pitchFamily="34" charset="0"/>
-                <a:ea typeface="Times New Roman" pitchFamily="34" charset="-122"/>
-                <a:cs typeface="Times New Roman" pitchFamily="34" charset="-120"/>
-              </a:rPr>
-              <a:t>Slanting rays cross a thicker layer of air and lose more energy by scattering and absorption.</a:t>
-            </a:r>
-            <a:endParaRPr lang="en-US" sz="3600" dirty="0"/>
-          </a:p>
-        </p:txBody>
-      </p:sp>
       <p:pic>
         <p:nvPicPr>
-          <p:cNvPr id="5" name="Image 0" descr="/home/claude/f4/img/v2/met2_imbalance.png">    </p:cNvPr>
+          <p:cNvPr id="3" name="Image 0" descr="/home/claude/f4/img/minesec_sheet.png">    </p:cNvPr>
           <p:cNvPicPr>
             <a:picLocks noChangeAspect="1"/>
           </p:cNvPicPr>
@@ -17327,8 +17177,8 @@
         </p:blipFill>
         <p:spPr>
           <a:xfrm>
-            <a:off x="5349240" y="2617506"/>
-            <a:ext cx="6659575" cy="2601397"/>
+            <a:off x="0" y="658368"/>
+            <a:ext cx="5120640" cy="5833872"/>
           </a:xfrm>
           <a:prstGeom prst="rect">
             <a:avLst/>
@@ -17337,14 +17187,14 @@
       </p:pic>
       <p:sp>
         <p:nvSpPr>
-          <p:cNvPr id="6" name="Text 3"/>
+          <p:cNvPr id="4" name="Text 1"/>
           <p:cNvSpPr/>
           <p:nvPr/>
         </p:nvSpPr>
         <p:spPr>
           <a:xfrm>
-            <a:off x="5349240" y="6089904"/>
-            <a:ext cx="6659575" cy="347472"/>
+            <a:off x="5349240" y="1005840"/>
+            <a:ext cx="6522415" cy="731520"/>
           </a:xfrm>
           <a:prstGeom prst="rect">
             <a:avLst/>
@@ -17353,24 +17203,85 @@
           <a:ln/>
         </p:spPr>
         <p:txBody>
-          <a:bodyPr wrap="square" lIns="0" tIns="0" rIns="0" bIns="0" rtlCol="0" anchor="ctr"/>
+          <a:bodyPr wrap="square" lIns="0" tIns="0" rIns="0" bIns="0" rtlCol="0" anchor="ctr">
+            <a:normAutofit/>
+          </a:bodyPr>
           <a:lstStyle/>
           <a:p>
             <a:pPr algn="ctr" indent="0" marL="0">
               <a:buNone/>
             </a:pPr>
             <a:r>
-              <a:rPr lang="en-US" sz="1600" i="1" dirty="0">
-                <a:solidFill>
-                  <a:srgbClr val="555555"/>
+              <a:rPr lang="en-US" sz="3600" b="1" dirty="0">
+                <a:solidFill>
+                  <a:srgbClr val="990011"/>
                 </a:solidFill>
                 <a:latin typeface="Times New Roman" pitchFamily="34" charset="0"/>
                 <a:ea typeface="Times New Roman" pitchFamily="34" charset="-122"/>
                 <a:cs typeface="Times New Roman" pitchFamily="34" charset="-120"/>
               </a:rPr>
-              <a:t>Illustration: reasons for the imbalance</a:t>
-            </a:r>
-            <a:endParaRPr lang="en-US" sz="1600" dirty="0"/>
+              <a:t>3. Reasons for the Differences</a:t>
+            </a:r>
+            <a:endParaRPr lang="en-US" sz="3600" dirty="0"/>
+          </a:p>
+        </p:txBody>
+      </p:sp>
+      <p:sp>
+        <p:nvSpPr>
+          <p:cNvPr id="5" name="Text 2"/>
+          <p:cNvSpPr/>
+          <p:nvPr/>
+        </p:nvSpPr>
+        <p:spPr>
+          <a:xfrm>
+            <a:off x="5349240" y="1783080"/>
+            <a:ext cx="6522415" cy="4663440"/>
+          </a:xfrm>
+          <a:prstGeom prst="rect">
+            <a:avLst/>
+          </a:prstGeom>
+          <a:noFill/>
+          <a:ln/>
+        </p:spPr>
+        <p:txBody>
+          <a:bodyPr wrap="square" lIns="0" tIns="0" rIns="0" bIns="0" rtlCol="0" anchor="t"/>
+          <a:lstStyle/>
+          <a:p>
+            <a:pPr algn="l" indent="0" marL="0">
+              <a:spcAft>
+                <a:spcPts val="800"/>
+              </a:spcAft>
+              <a:buNone/>
+            </a:pPr>
+            <a:r>
+              <a:rPr lang="en-US" sz="4000" b="1" dirty="0">
+                <a:solidFill>
+                  <a:srgbClr val="111111"/>
+                </a:solidFill>
+                <a:latin typeface="Times New Roman" pitchFamily="34" charset="0"/>
+                <a:ea typeface="Times New Roman" pitchFamily="34" charset="-122"/>
+                <a:cs typeface="Times New Roman" pitchFamily="34" charset="-120"/>
+              </a:rPr>
+              <a:t>Length of day: </a:t>
+            </a:r>
+            <a:pPr algn="l" indent="0" marL="0">
+              <a:spcAft>
+                <a:spcPts val="800"/>
+              </a:spcAft>
+              <a:buNone/>
+            </a:pPr>
+            <a:r>
+              <a:rPr lang="en-US" sz="4000" dirty="0">
+                <a:solidFill>
+                  <a:srgbClr val="111111"/>
+                </a:solidFill>
+                <a:latin typeface="Times New Roman" pitchFamily="34" charset="0"/>
+                <a:ea typeface="Times New Roman" pitchFamily="34" charset="-122"/>
+                <a:cs typeface="Times New Roman" pitchFamily="34" charset="-120"/>
+              </a:rPr>
+              <a:t>Polar regions have months of darkness in winter, when they receive no solar radiation at all. The tropics have about 12 hours of daylight all year.</a:t>
+            </a:r>
+            <a:endParaRPr lang="en-US" sz="4000" dirty="0"/>
           </a:p>
         </p:txBody>
       </p:sp>
@@ -17486,9 +17397,129 @@
           </a:p>
         </p:txBody>
       </p:sp>
+      <p:sp>
+        <p:nvSpPr>
+          <p:cNvPr id="3" name="Text 1"/>
+          <p:cNvSpPr/>
+          <p:nvPr/>
+        </p:nvSpPr>
+        <p:spPr>
+          <a:xfrm>
+            <a:off x="365760" y="1005840"/>
+            <a:ext cx="11460175" cy="731520"/>
+          </a:xfrm>
+          <a:prstGeom prst="rect">
+            <a:avLst/>
+          </a:prstGeom>
+          <a:noFill/>
+          <a:ln/>
+        </p:spPr>
+        <p:txBody>
+          <a:bodyPr wrap="square" lIns="0" tIns="0" rIns="0" bIns="0" rtlCol="0" anchor="ctr">
+            <a:normAutofit/>
+          </a:bodyPr>
+          <a:lstStyle/>
+          <a:p>
+            <a:pPr algn="ctr" indent="0" marL="0">
+              <a:buNone/>
+            </a:pPr>
+            <a:r>
+              <a:rPr lang="en-US" sz="3600" b="1" dirty="0">
+                <a:solidFill>
+                  <a:srgbClr val="990011"/>
+                </a:solidFill>
+                <a:latin typeface="Times New Roman" pitchFamily="34" charset="0"/>
+                <a:ea typeface="Times New Roman" pitchFamily="34" charset="-122"/>
+                <a:cs typeface="Times New Roman" pitchFamily="34" charset="-120"/>
+              </a:rPr>
+              <a:t>4. Balancing Mechanisms</a:t>
+            </a:r>
+            <a:endParaRPr lang="en-US" sz="3600" dirty="0"/>
+          </a:p>
+        </p:txBody>
+      </p:sp>
+      <p:sp>
+        <p:nvSpPr>
+          <p:cNvPr id="4" name="Text 2"/>
+          <p:cNvSpPr/>
+          <p:nvPr/>
+        </p:nvSpPr>
+        <p:spPr>
+          <a:xfrm>
+            <a:off x="365760" y="1783080"/>
+            <a:ext cx="6035040" cy="4617720"/>
+          </a:xfrm>
+          <a:prstGeom prst="rect">
+            <a:avLst/>
+          </a:prstGeom>
+          <a:noFill/>
+          <a:ln/>
+        </p:spPr>
+        <p:txBody>
+          <a:bodyPr wrap="square" lIns="0" tIns="0" rIns="0" bIns="0" rtlCol="0" anchor="t"/>
+          <a:lstStyle/>
+          <a:p>
+            <a:pPr algn="l" indent="0" marL="0">
+              <a:spcAft>
+                <a:spcPts val="800"/>
+              </a:spcAft>
+              <a:buNone/>
+            </a:pPr>
+            <a:r>
+              <a:rPr lang="en-US" sz="2800" i="1" dirty="0">
+                <a:solidFill>
+                  <a:srgbClr val="111111"/>
+                </a:solidFill>
+                <a:latin typeface="Times New Roman" pitchFamily="34" charset="0"/>
+                <a:ea typeface="Times New Roman" pitchFamily="34" charset="-122"/>
+                <a:cs typeface="Times New Roman" pitchFamily="34" charset="-120"/>
+              </a:rPr>
+              <a:t>The surplus of the tropics is carried to the zones of deficit by the following mechanisms:</a:t>
+            </a:r>
+            <a:endParaRPr lang="en-US" sz="2800" dirty="0"/>
+          </a:p>
+          <a:p>
+            <a:pPr algn="l" indent="0" marL="0">
+              <a:spcAft>
+                <a:spcPts val="800"/>
+              </a:spcAft>
+              <a:buNone/>
+            </a:pPr>
+            <a:r>
+              <a:rPr lang="en-US" sz="2800" b="1" dirty="0">
+                <a:solidFill>
+                  <a:srgbClr val="111111"/>
+                </a:solidFill>
+                <a:latin typeface="Times New Roman" pitchFamily="34" charset="0"/>
+                <a:ea typeface="Times New Roman" pitchFamily="34" charset="-122"/>
+                <a:cs typeface="Times New Roman" pitchFamily="34" charset="-120"/>
+              </a:rPr>
+              <a:t>Atmospheric circulation: </a:t>
+            </a:r>
+            <a:pPr algn="l" indent="0" marL="0">
+              <a:spcAft>
+                <a:spcPts val="800"/>
+              </a:spcAft>
+              <a:buNone/>
+            </a:pPr>
+            <a:r>
+              <a:rPr lang="en-US" sz="2800" dirty="0">
+                <a:solidFill>
+                  <a:srgbClr val="111111"/>
+                </a:solidFill>
+                <a:latin typeface="Times New Roman" pitchFamily="34" charset="0"/>
+                <a:ea typeface="Times New Roman" pitchFamily="34" charset="-122"/>
+                <a:cs typeface="Times New Roman" pitchFamily="34" charset="-120"/>
+              </a:rPr>
+              <a:t>Winds, air masses and storms carry warm air towards the poles and cold air towards the Equator. They transfer about two-thirds of the heat that moves from the tropics to higher latitudes.</a:t>
+            </a:r>
+            <a:endParaRPr lang="en-US" sz="2800" dirty="0"/>
+          </a:p>
+        </p:txBody>
+      </p:sp>
       <p:pic>
         <p:nvPicPr>
-          <p:cNvPr id="3" name="Image 0" descr="/home/claude/f4/img/minesec_sheet.png">    </p:cNvPr>
+          <p:cNvPr id="5" name="Image 0" descr="/home/claude/f4/img/v2/heat_transfer_big.png">    </p:cNvPr>
           <p:cNvPicPr>
             <a:picLocks noChangeAspect="1"/>
           </p:cNvPicPr>
@@ -17502,8 +17533,8 @@
         </p:blipFill>
         <p:spPr>
           <a:xfrm>
-            <a:off x="0" y="658368"/>
-            <a:ext cx="5120640" cy="5833872"/>
+            <a:off x="6537960" y="2849678"/>
+            <a:ext cx="5470855" cy="2137053"/>
           </a:xfrm>
           <a:prstGeom prst="rect">
             <a:avLst/>
@@ -17512,14 +17543,14 @@
       </p:pic>
       <p:sp>
         <p:nvSpPr>
-          <p:cNvPr id="4" name="Text 1"/>
+          <p:cNvPr id="6" name="Text 3"/>
           <p:cNvSpPr/>
           <p:nvPr/>
         </p:nvSpPr>
         <p:spPr>
           <a:xfrm>
-            <a:off x="5349240" y="1005840"/>
-            <a:ext cx="6522415" cy="731520"/>
+            <a:off x="6537960" y="6089904"/>
+            <a:ext cx="5470855" cy="347472"/>
           </a:xfrm>
           <a:prstGeom prst="rect">
             <a:avLst/>
@@ -17528,85 +17559,24 @@
           <a:ln/>
         </p:spPr>
         <p:txBody>
-          <a:bodyPr wrap="square" lIns="0" tIns="0" rIns="0" bIns="0" rtlCol="0" anchor="ctr">
-            <a:normAutofit/>
-          </a:bodyPr>
+          <a:bodyPr wrap="square" lIns="0" tIns="0" rIns="0" bIns="0" rtlCol="0" anchor="ctr"/>
           <a:lstStyle/>
           <a:p>
             <a:pPr algn="ctr" indent="0" marL="0">
               <a:buNone/>
             </a:pPr>
             <a:r>
-              <a:rPr lang="en-US" sz="3600" b="1" dirty="0">
-                <a:solidFill>
-                  <a:srgbClr val="990011"/>
+              <a:rPr lang="en-US" sz="1600" i="1" dirty="0">
+                <a:solidFill>
+                  <a:srgbClr val="555555"/>
                 </a:solidFill>
                 <a:latin typeface="Times New Roman" pitchFamily="34" charset="0"/>
                 <a:ea typeface="Times New Roman" pitchFamily="34" charset="-122"/>
                 <a:cs typeface="Times New Roman" pitchFamily="34" charset="-120"/>
               </a:rPr>
-              <a:t>3. Reasons for the Imbalance</a:t>
-            </a:r>
-            <a:endParaRPr lang="en-US" sz="3600" dirty="0"/>
-          </a:p>
-        </p:txBody>
-      </p:sp>
-      <p:sp>
-        <p:nvSpPr>
-          <p:cNvPr id="5" name="Text 2"/>
-          <p:cNvSpPr/>
-          <p:nvPr/>
-        </p:nvSpPr>
-        <p:spPr>
-          <a:xfrm>
-            <a:off x="5349240" y="1783080"/>
-            <a:ext cx="6522415" cy="4663440"/>
-          </a:xfrm>
-          <a:prstGeom prst="rect">
-            <a:avLst/>
-          </a:prstGeom>
-          <a:noFill/>
-          <a:ln/>
-        </p:spPr>
-        <p:txBody>
-          <a:bodyPr wrap="square" lIns="0" tIns="0" rIns="0" bIns="0" rtlCol="0" anchor="t"/>
-          <a:lstStyle/>
-          <a:p>
-            <a:pPr algn="l" indent="0" marL="0">
-              <a:spcAft>
-                <a:spcPts val="800"/>
-              </a:spcAft>
-              <a:buNone/>
-            </a:pPr>
-            <a:r>
-              <a:rPr lang="en-US" sz="4000" b="1" dirty="0">
-                <a:solidFill>
-                  <a:srgbClr val="111111"/>
-                </a:solidFill>
-                <a:latin typeface="Times New Roman" pitchFamily="34" charset="0"/>
-                <a:ea typeface="Times New Roman" pitchFamily="34" charset="-122"/>
-                <a:cs typeface="Times New Roman" pitchFamily="34" charset="-120"/>
-              </a:rPr>
-              <a:t>Length of day: </a:t>
-            </a:r>
-            <a:pPr algn="l" indent="0" marL="0">
-              <a:spcAft>
-                <a:spcPts val="800"/>
-              </a:spcAft>
-              <a:buNone/>
-            </a:pPr>
-            <a:r>
-              <a:rPr lang="en-US" sz="4000" dirty="0">
-                <a:solidFill>
-                  <a:srgbClr val="111111"/>
-                </a:solidFill>
-                <a:latin typeface="Times New Roman" pitchFamily="34" charset="0"/>
-                <a:ea typeface="Times New Roman" pitchFamily="34" charset="-122"/>
-                <a:cs typeface="Times New Roman" pitchFamily="34" charset="-120"/>
-              </a:rPr>
-              <a:t>Polar regions have months of darkness in winter.</a:t>
-            </a:r>
-            <a:endParaRPr lang="en-US" sz="4000" dirty="0"/>
+              <a:t>Illustration: heat transfer towards the poles</a:t>
+            </a:r>
+            <a:endParaRPr lang="en-US" sz="1600" dirty="0"/>
           </a:p>
         </p:txBody>
       </p:sp>
@@ -17757,7 +17727,7 @@
                 <a:ea typeface="Times New Roman" pitchFamily="34" charset="-122"/>
                 <a:cs typeface="Times New Roman" pitchFamily="34" charset="-120"/>
               </a:rPr>
-              <a:t>4. Balancing Mechanisms (Global Heat Transfer)</a:t>
+              <a:t>4. Balancing Mechanisms</a:t>
             </a:r>
             <a:endParaRPr lang="en-US" sz="3600" dirty="0"/>
           </a:p>
@@ -17772,7 +17742,7 @@
         <p:spPr>
           <a:xfrm>
             <a:off x="365760" y="1783080"/>
-            <a:ext cx="4846320" cy="4617720"/>
+            <a:ext cx="6035040" cy="4617720"/>
           </a:xfrm>
           <a:prstGeom prst="rect">
             <a:avLst/>
@@ -17791,7 +17761,7 @@
               <a:buNone/>
             </a:pPr>
             <a:r>
-              <a:rPr lang="en-US" sz="3200" i="1" dirty="0">
+              <a:rPr lang="en-US" sz="3600" b="1" dirty="0">
                 <a:solidFill>
                   <a:srgbClr val="111111"/>
                 </a:solidFill>
@@ -17799,11 +17769,8 @@
                 <a:ea typeface="Times New Roman" pitchFamily="34" charset="-122"/>
                 <a:cs typeface="Times New Roman" pitchFamily="34" charset="-120"/>
               </a:rPr>
-              <a:t>Heat is transferred from the tropics towards the poles as follows:</a:t>
-            </a:r>
-            <a:endParaRPr lang="en-US" sz="3200" dirty="0"/>
-          </a:p>
-          <a:p>
+              <a:t>Ocean currents: </a:t>
+            </a:r>
             <a:pPr algn="l" indent="0" marL="0">
               <a:spcAft>
                 <a:spcPts val="800"/>
@@ -17811,7 +17778,7 @@
               <a:buNone/>
             </a:pPr>
             <a:r>
-              <a:rPr lang="en-US" sz="3200" b="1" dirty="0">
+              <a:rPr lang="en-US" sz="3600" dirty="0">
                 <a:solidFill>
                   <a:srgbClr val="111111"/>
                 </a:solidFill>
@@ -17819,32 +17786,15 @@
                 <a:ea typeface="Times New Roman" pitchFamily="34" charset="-122"/>
                 <a:cs typeface="Times New Roman" pitchFamily="34" charset="-120"/>
               </a:rPr>
-              <a:t>Atmospheric circulation: </a:t>
-            </a:r>
-            <a:pPr algn="l" indent="0" marL="0">
-              <a:spcAft>
-                <a:spcPts val="800"/>
-              </a:spcAft>
-              <a:buNone/>
-            </a:pPr>
-            <a:r>
-              <a:rPr lang="en-US" sz="3200" dirty="0">
-                <a:solidFill>
-                  <a:srgbClr val="111111"/>
-                </a:solidFill>
-                <a:latin typeface="Times New Roman" pitchFamily="34" charset="0"/>
-                <a:ea typeface="Times New Roman" pitchFamily="34" charset="-122"/>
-                <a:cs typeface="Times New Roman" pitchFamily="34" charset="-120"/>
-              </a:rPr>
-              <a:t>Winds such as the trade winds and westerlies, and storms, carry about two-thirds of the heat transferred.</a:t>
-            </a:r>
-            <a:endParaRPr lang="en-US" sz="3200" dirty="0"/>
+              <a:t>Warm currents such as the Gulf Stream carry warm water towards the poles, while cold currents bring cool water towards the Equator. They transfer about one-third of the surplus heat.</a:t>
+            </a:r>
+            <a:endParaRPr lang="en-US" sz="3600" dirty="0"/>
           </a:p>
         </p:txBody>
       </p:sp>
       <p:pic>
         <p:nvPicPr>
-          <p:cNvPr id="5" name="Image 0" descr="/home/claude/f4/img/v2/heat_transfer_big.png">    </p:cNvPr>
+          <p:cNvPr id="5" name="Image 0" descr="/home/claude/f4/img/v2/ocean_currents_big.png">    </p:cNvPr>
           <p:cNvPicPr>
             <a:picLocks noChangeAspect="1"/>
           </p:cNvPicPr>
@@ -17858,8 +17808,8 @@
         </p:blipFill>
         <p:spPr>
           <a:xfrm>
-            <a:off x="5349240" y="2617506"/>
-            <a:ext cx="6659575" cy="2601397"/>
+            <a:off x="6537960" y="2550490"/>
+            <a:ext cx="5470855" cy="2735428"/>
           </a:xfrm>
           <a:prstGeom prst="rect">
             <a:avLst/>
@@ -17874,8 +17824,8 @@
         </p:nvSpPr>
         <p:spPr>
           <a:xfrm>
-            <a:off x="5349240" y="6089904"/>
-            <a:ext cx="6659575" cy="347472"/>
+            <a:off x="6537960" y="6089904"/>
+            <a:ext cx="5470855" cy="347472"/>
           </a:xfrm>
           <a:prstGeom prst="rect">
             <a:avLst/>
@@ -17899,7 +17849,7 @@
                 <a:ea typeface="Times New Roman" pitchFamily="34" charset="-122"/>
                 <a:cs typeface="Times New Roman" pitchFamily="34" charset="-120"/>
               </a:rPr>
-              <a:t>Illustration: heat transfer</a:t>
+              <a:t>Illustration: ocean currents</a:t>
             </a:r>
             <a:endParaRPr lang="en-US" sz="1600" dirty="0"/>
           </a:p>
@@ -18017,109 +17967,9 @@
           </a:p>
         </p:txBody>
       </p:sp>
-      <p:sp>
-        <p:nvSpPr>
-          <p:cNvPr id="3" name="Text 1"/>
-          <p:cNvSpPr/>
-          <p:nvPr/>
-        </p:nvSpPr>
-        <p:spPr>
-          <a:xfrm>
-            <a:off x="365760" y="1005840"/>
-            <a:ext cx="11460175" cy="731520"/>
-          </a:xfrm>
-          <a:prstGeom prst="rect">
-            <a:avLst/>
-          </a:prstGeom>
-          <a:noFill/>
-          <a:ln/>
-        </p:spPr>
-        <p:txBody>
-          <a:bodyPr wrap="square" lIns="0" tIns="0" rIns="0" bIns="0" rtlCol="0" anchor="ctr">
-            <a:normAutofit/>
-          </a:bodyPr>
-          <a:lstStyle/>
-          <a:p>
-            <a:pPr algn="ctr" indent="0" marL="0">
-              <a:buNone/>
-            </a:pPr>
-            <a:r>
-              <a:rPr lang="en-US" sz="3600" b="1" dirty="0">
-                <a:solidFill>
-                  <a:srgbClr val="990011"/>
-                </a:solidFill>
-                <a:latin typeface="Times New Roman" pitchFamily="34" charset="0"/>
-                <a:ea typeface="Times New Roman" pitchFamily="34" charset="-122"/>
-                <a:cs typeface="Times New Roman" pitchFamily="34" charset="-120"/>
-              </a:rPr>
-              <a:t>4. Balancing Mechanisms (Global Heat Transfer)</a:t>
-            </a:r>
-            <a:endParaRPr lang="en-US" sz="3600" dirty="0"/>
-          </a:p>
-        </p:txBody>
-      </p:sp>
-      <p:sp>
-        <p:nvSpPr>
-          <p:cNvPr id="4" name="Text 2"/>
-          <p:cNvSpPr/>
-          <p:nvPr/>
-        </p:nvSpPr>
-        <p:spPr>
-          <a:xfrm>
-            <a:off x="365760" y="1783080"/>
-            <a:ext cx="4846320" cy="4617720"/>
-          </a:xfrm>
-          <a:prstGeom prst="rect">
-            <a:avLst/>
-          </a:prstGeom>
-          <a:noFill/>
-          <a:ln/>
-        </p:spPr>
-        <p:txBody>
-          <a:bodyPr wrap="square" lIns="0" tIns="0" rIns="0" bIns="0" rtlCol="0" anchor="t"/>
-          <a:lstStyle/>
-          <a:p>
-            <a:pPr algn="l" indent="0" marL="0">
-              <a:spcAft>
-                <a:spcPts val="800"/>
-              </a:spcAft>
-              <a:buNone/>
-            </a:pPr>
-            <a:r>
-              <a:rPr lang="en-US" sz="3600" b="1" dirty="0">
-                <a:solidFill>
-                  <a:srgbClr val="111111"/>
-                </a:solidFill>
-                <a:latin typeface="Times New Roman" pitchFamily="34" charset="0"/>
-                <a:ea typeface="Times New Roman" pitchFamily="34" charset="-122"/>
-                <a:cs typeface="Times New Roman" pitchFamily="34" charset="-120"/>
-              </a:rPr>
-              <a:t>Ocean currents: </a:t>
-            </a:r>
-            <a:pPr algn="l" indent="0" marL="0">
-              <a:spcAft>
-                <a:spcPts val="800"/>
-              </a:spcAft>
-              <a:buNone/>
-            </a:pPr>
-            <a:r>
-              <a:rPr lang="en-US" sz="3600" dirty="0">
-                <a:solidFill>
-                  <a:srgbClr val="111111"/>
-                </a:solidFill>
-                <a:latin typeface="Times New Roman" pitchFamily="34" charset="0"/>
-                <a:ea typeface="Times New Roman" pitchFamily="34" charset="-122"/>
-                <a:cs typeface="Times New Roman" pitchFamily="34" charset="-120"/>
-              </a:rPr>
-              <a:t>Warm currents like the Gulf Stream carry heat poleward, and cold currents bring cool water towards the Equator.</a:t>
-            </a:r>
-            <a:endParaRPr lang="en-US" sz="3600" dirty="0"/>
-          </a:p>
-        </p:txBody>
-      </p:sp>
       <p:pic>
         <p:nvPicPr>
-          <p:cNvPr id="5" name="Image 0" descr="/home/claude/f4/img/v2/ocean_currents_big.png">    </p:cNvPr>
+          <p:cNvPr id="3" name="Image 0" descr="/home/claude/f4/img/minesec_sheet.png">    </p:cNvPr>
           <p:cNvPicPr>
             <a:picLocks noChangeAspect="1"/>
           </p:cNvPicPr>
@@ -18133,8 +17983,8 @@
         </p:blipFill>
         <p:spPr>
           <a:xfrm>
-            <a:off x="5349240" y="2253310"/>
-            <a:ext cx="6659575" cy="3329788"/>
+            <a:off x="0" y="658368"/>
+            <a:ext cx="3840480" cy="5833872"/>
           </a:xfrm>
           <a:prstGeom prst="rect">
             <a:avLst/>
@@ -18143,14 +17993,14 @@
       </p:pic>
       <p:sp>
         <p:nvSpPr>
-          <p:cNvPr id="6" name="Text 3"/>
+          <p:cNvPr id="4" name="Text 1"/>
           <p:cNvSpPr/>
           <p:nvPr/>
         </p:nvSpPr>
         <p:spPr>
           <a:xfrm>
-            <a:off x="5349240" y="6089904"/>
-            <a:ext cx="6659575" cy="347472"/>
+            <a:off x="4069080" y="1005840"/>
+            <a:ext cx="7802575" cy="731520"/>
           </a:xfrm>
           <a:prstGeom prst="rect">
             <a:avLst/>
@@ -18159,24 +18009,85 @@
           <a:ln/>
         </p:spPr>
         <p:txBody>
-          <a:bodyPr wrap="square" lIns="0" tIns="0" rIns="0" bIns="0" rtlCol="0" anchor="ctr"/>
+          <a:bodyPr wrap="square" lIns="0" tIns="0" rIns="0" bIns="0" rtlCol="0" anchor="ctr">
+            <a:normAutofit/>
+          </a:bodyPr>
           <a:lstStyle/>
           <a:p>
             <a:pPr algn="ctr" indent="0" marL="0">
               <a:buNone/>
             </a:pPr>
             <a:r>
-              <a:rPr lang="en-US" sz="1600" i="1" dirty="0">
-                <a:solidFill>
-                  <a:srgbClr val="555555"/>
+              <a:rPr lang="en-US" sz="3600" b="1" dirty="0">
+                <a:solidFill>
+                  <a:srgbClr val="990011"/>
                 </a:solidFill>
                 <a:latin typeface="Times New Roman" pitchFamily="34" charset="0"/>
                 <a:ea typeface="Times New Roman" pitchFamily="34" charset="-122"/>
                 <a:cs typeface="Times New Roman" pitchFamily="34" charset="-120"/>
               </a:rPr>
-              <a:t>Illustration: ocean currents</a:t>
-            </a:r>
-            <a:endParaRPr lang="en-US" sz="1600" dirty="0"/>
+              <a:t>4. Balancing Mechanisms</a:t>
+            </a:r>
+            <a:endParaRPr lang="en-US" sz="3600" dirty="0"/>
+          </a:p>
+        </p:txBody>
+      </p:sp>
+      <p:sp>
+        <p:nvSpPr>
+          <p:cNvPr id="5" name="Text 2"/>
+          <p:cNvSpPr/>
+          <p:nvPr/>
+        </p:nvSpPr>
+        <p:spPr>
+          <a:xfrm>
+            <a:off x="4069080" y="1783080"/>
+            <a:ext cx="7802575" cy="4663440"/>
+          </a:xfrm>
+          <a:prstGeom prst="rect">
+            <a:avLst/>
+          </a:prstGeom>
+          <a:noFill/>
+          <a:ln/>
+        </p:spPr>
+        <p:txBody>
+          <a:bodyPr wrap="square" lIns="0" tIns="0" rIns="0" bIns="0" rtlCol="0" anchor="t"/>
+          <a:lstStyle/>
+          <a:p>
+            <a:pPr algn="l" indent="0" marL="0">
+              <a:spcAft>
+                <a:spcPts val="800"/>
+              </a:spcAft>
+              <a:buNone/>
+            </a:pPr>
+            <a:r>
+              <a:rPr lang="en-US" sz="4000" b="1" dirty="0">
+                <a:solidFill>
+                  <a:srgbClr val="111111"/>
+                </a:solidFill>
+                <a:latin typeface="Times New Roman" pitchFamily="34" charset="0"/>
+                <a:ea typeface="Times New Roman" pitchFamily="34" charset="-122"/>
+                <a:cs typeface="Times New Roman" pitchFamily="34" charset="-120"/>
+              </a:rPr>
+              <a:t>Transfer of latent heat: </a:t>
+            </a:r>
+            <a:pPr algn="l" indent="0" marL="0">
+              <a:spcAft>
+                <a:spcPts val="800"/>
+              </a:spcAft>
+              <a:buNone/>
+            </a:pPr>
+            <a:r>
+              <a:rPr lang="en-US" sz="4000" dirty="0">
+                <a:solidFill>
+                  <a:srgbClr val="111111"/>
+                </a:solidFill>
+                <a:latin typeface="Times New Roman" pitchFamily="34" charset="0"/>
+                <a:ea typeface="Times New Roman" pitchFamily="34" charset="-122"/>
+                <a:cs typeface="Times New Roman" pitchFamily="34" charset="-120"/>
+              </a:rPr>
+              <a:t>Water that evaporates from tropical oceans stores heat in its vapour. Winds carry this vapour to higher latitudes, where the heat is released when it condenses into clouds.</a:t>
+            </a:r>
+            <a:endParaRPr lang="en-US" sz="4000" dirty="0"/>
           </a:p>
         </p:txBody>
       </p:sp>
@@ -18286,7 +18197,7 @@
                 <a:ea typeface="Calibri" pitchFamily="34" charset="-122"/>
                 <a:cs typeface="Calibri" pitchFamily="34" charset="-120"/>
               </a:rPr>
-              <a:t>BOARD SUMMARY</a:t>
+              <a:t>FORMATIVE EVALUATION</a:t>
             </a:r>
             <a:endParaRPr lang="en-US" sz="1400" dirty="0"/>
           </a:p>
@@ -18351,7 +18262,7 @@
                 <a:ea typeface="Times New Roman" pitchFamily="34" charset="-122"/>
                 <a:cs typeface="Times New Roman" pitchFamily="34" charset="-120"/>
               </a:rPr>
-              <a:t>4. Balancing Mechanisms (Global Heat Transfer)</a:t>
+              <a:t>Evaluation 1</a:t>
             </a:r>
             <a:endParaRPr lang="en-US" sz="3600" dirty="0"/>
           </a:p>
@@ -18385,7 +18296,7 @@
               <a:buNone/>
             </a:pPr>
             <a:r>
-              <a:rPr lang="en-US" sz="4000" b="1" dirty="0">
+              <a:rPr lang="en-US" sz="4000" dirty="0">
                 <a:solidFill>
                   <a:srgbClr val="111111"/>
                 </a:solidFill>
@@ -18393,24 +18304,7 @@
                 <a:ea typeface="Times New Roman" pitchFamily="34" charset="-122"/>
                 <a:cs typeface="Times New Roman" pitchFamily="34" charset="-120"/>
               </a:rPr>
-              <a:t>Result: </a:t>
-            </a:r>
-            <a:pPr algn="l" indent="0" marL="0">
-              <a:spcAft>
-                <a:spcPts val="800"/>
-              </a:spcAft>
-              <a:buNone/>
-            </a:pPr>
-            <a:r>
-              <a:rPr lang="en-US" sz="4000" dirty="0">
-                <a:solidFill>
-                  <a:srgbClr val="111111"/>
-                </a:solidFill>
-                <a:latin typeface="Times New Roman" pitchFamily="34" charset="0"/>
-                <a:ea typeface="Times New Roman" pitchFamily="34" charset="-122"/>
-                <a:cs typeface="Times New Roman" pitchFamily="34" charset="-120"/>
-              </a:rPr>
-              <a:t>Without these transfers, the tropics would become hotter and hotter and the poles colder and colder.</a:t>
+              <a:t>Why does a farmer in Garoua receive more intense heat than a fisherman in Norway?</a:t>
             </a:r>
             <a:endParaRPr lang="en-US" sz="4000" dirty="0"/>
           </a:p>
@@ -18806,7 +18700,7 @@
                 <a:ea typeface="Times New Roman" pitchFamily="34" charset="-122"/>
                 <a:cs typeface="Times New Roman" pitchFamily="34" charset="-120"/>
               </a:rPr>
-              <a:t>Evaluation 1</a:t>
+              <a:t>Expected Answer</a:t>
             </a:r>
             <a:endParaRPr lang="en-US" sz="3600" dirty="0"/>
           </a:p>
@@ -18848,7 +18742,7 @@
                 <a:ea typeface="Times New Roman" pitchFamily="34" charset="-122"/>
                 <a:cs typeface="Times New Roman" pitchFamily="34" charset="-120"/>
               </a:rPr>
-              <a:t>Why does a farmer in Garoua receive more intense heat than a fisherman in Norway?</a:t>
+              <a:t>The sun is high over Garoua, so its rays are concentrated; in Norway the rays are slanting and spread out.</a:t>
             </a:r>
             <a:endParaRPr lang="en-US" sz="4000" dirty="0"/>
           </a:p>
@@ -19025,7 +18919,7 @@
                 <a:ea typeface="Times New Roman" pitchFamily="34" charset="-122"/>
                 <a:cs typeface="Times New Roman" pitchFamily="34" charset="-120"/>
               </a:rPr>
-              <a:t>Expected Answer</a:t>
+              <a:t>Evaluation 2</a:t>
             </a:r>
             <a:endParaRPr lang="en-US" sz="3600" dirty="0"/>
           </a:p>
@@ -19067,7 +18961,7 @@
                 <a:ea typeface="Times New Roman" pitchFamily="34" charset="-122"/>
                 <a:cs typeface="Times New Roman" pitchFamily="34" charset="-120"/>
               </a:rPr>
-              <a:t>The sun is high over Garoua, so its rays are concentrated; in Norway the rays are slanting and spread out.</a:t>
+              <a:t>Give two mechanisms that transfer heat from the tropics to the poles.</a:t>
             </a:r>
             <a:endParaRPr lang="en-US" sz="4000" dirty="0"/>
           </a:p>
@@ -19244,7 +19138,7 @@
                 <a:ea typeface="Times New Roman" pitchFamily="34" charset="-122"/>
                 <a:cs typeface="Times New Roman" pitchFamily="34" charset="-120"/>
               </a:rPr>
-              <a:t>Evaluation 2</a:t>
+              <a:t>Expected Answer</a:t>
             </a:r>
             <a:endParaRPr lang="en-US" sz="3600" dirty="0"/>
           </a:p>
@@ -19286,7 +19180,7 @@
                 <a:ea typeface="Times New Roman" pitchFamily="34" charset="-122"/>
                 <a:cs typeface="Times New Roman" pitchFamily="34" charset="-120"/>
               </a:rPr>
-              <a:t>Give two mechanisms that transfer heat from the tropics to the poles.</a:t>
+              <a:t>Winds (atmospheric circulation) and ocean currents.</a:t>
             </a:r>
             <a:endParaRPr lang="en-US" sz="4000" dirty="0"/>
           </a:p>
@@ -19398,7 +19292,7 @@
                 <a:ea typeface="Calibri" pitchFamily="34" charset="-122"/>
                 <a:cs typeface="Calibri" pitchFamily="34" charset="-120"/>
               </a:rPr>
-              <a:t>FORMATIVE EVALUATION</a:t>
+              <a:t>REMEDIATION</a:t>
             </a:r>
             <a:endParaRPr lang="en-US" sz="1400" dirty="0"/>
           </a:p>
@@ -19463,7 +19357,7 @@
                 <a:ea typeface="Times New Roman" pitchFamily="34" charset="-122"/>
                 <a:cs typeface="Times New Roman" pitchFamily="34" charset="-120"/>
               </a:rPr>
-              <a:t>Expected Answer</a:t>
+              <a:t>Remediation</a:t>
             </a:r>
             <a:endParaRPr lang="en-US" sz="3600" dirty="0"/>
           </a:p>
@@ -19497,7 +19391,7 @@
               <a:buNone/>
             </a:pPr>
             <a:r>
-              <a:rPr lang="en-US" sz="4000" dirty="0">
+              <a:rPr lang="en-US" sz="4000" b="1" dirty="0">
                 <a:solidFill>
                   <a:srgbClr val="111111"/>
                 </a:solidFill>
@@ -19505,7 +19399,73 @@
                 <a:ea typeface="Times New Roman" pitchFamily="34" charset="-122"/>
                 <a:cs typeface="Times New Roman" pitchFamily="34" charset="-120"/>
               </a:rPr>
-              <a:t>Winds (atmospheric circulation) and ocean currents.</a:t>
+              <a:t>Fill in the blanks:</a:t>
+            </a:r>
+            <a:endParaRPr lang="en-US" sz="4000" dirty="0"/>
+          </a:p>
+          <a:p>
+            <a:pPr algn="l" marL="342900" indent="-342900">
+              <a:spcAft>
+                <a:spcPts val="800"/>
+              </a:spcAft>
+              <a:buSzPct val="100000"/>
+              <a:buFont typeface="+mj-lt"/>
+              <a:buAutoNum type="arabicPeriod" startAt="1"/>
+            </a:pPr>
+            <a:r>
+              <a:rPr lang="en-US" sz="4000" dirty="0">
+                <a:solidFill>
+                  <a:srgbClr val="111111"/>
+                </a:solidFill>
+                <a:latin typeface="Times New Roman" pitchFamily="34" charset="0"/>
+                <a:ea typeface="Times New Roman" pitchFamily="34" charset="-122"/>
+                <a:cs typeface="Times New Roman" pitchFamily="34" charset="-120"/>
+              </a:rPr>
+              <a:t>The tropics have an energy ______.</a:t>
+            </a:r>
+            <a:endParaRPr lang="en-US" sz="4000" dirty="0"/>
+          </a:p>
+          <a:p>
+            <a:pPr algn="l" marL="342900" indent="-342900">
+              <a:spcAft>
+                <a:spcPts val="800"/>
+              </a:spcAft>
+              <a:buSzPct val="100000"/>
+              <a:buFont typeface="+mj-lt"/>
+              <a:buAutoNum type="arabicPeriod" startAt="1"/>
+            </a:pPr>
+            <a:r>
+              <a:rPr lang="en-US" sz="4000" dirty="0">
+                <a:solidFill>
+                  <a:srgbClr val="111111"/>
+                </a:solidFill>
+                <a:latin typeface="Times New Roman" pitchFamily="34" charset="0"/>
+                <a:ea typeface="Times New Roman" pitchFamily="34" charset="-122"/>
+                <a:cs typeface="Times New Roman" pitchFamily="34" charset="-120"/>
+              </a:rPr>
+              <a:t>Snow has a high ______.</a:t>
+            </a:r>
+            <a:endParaRPr lang="en-US" sz="4000" dirty="0"/>
+          </a:p>
+          <a:p>
+            <a:pPr algn="l" marL="342900" indent="-342900">
+              <a:spcAft>
+                <a:spcPts val="800"/>
+              </a:spcAft>
+              <a:buSzPct val="100000"/>
+              <a:buFont typeface="+mj-lt"/>
+              <a:buAutoNum type="arabicPeriod" startAt="1"/>
+            </a:pPr>
+            <a:r>
+              <a:rPr lang="en-US" sz="4000" dirty="0">
+                <a:solidFill>
+                  <a:srgbClr val="111111"/>
+                </a:solidFill>
+                <a:latin typeface="Times New Roman" pitchFamily="34" charset="0"/>
+                <a:ea typeface="Times New Roman" pitchFamily="34" charset="-122"/>
+                <a:cs typeface="Times New Roman" pitchFamily="34" charset="-120"/>
+              </a:rPr>
+              <a:t>The Gulf Stream is a ______ current.</a:t>
             </a:r>
             <a:endParaRPr lang="en-US" sz="4000" dirty="0"/>
           </a:p>
@@ -19617,7 +19577,7 @@
                 <a:ea typeface="Calibri" pitchFamily="34" charset="-122"/>
                 <a:cs typeface="Calibri" pitchFamily="34" charset="-120"/>
               </a:rPr>
-              <a:t>REMEDIATION</a:t>
+              <a:t>HOMEWORK</a:t>
             </a:r>
             <a:endParaRPr lang="en-US" sz="1400" dirty="0"/>
           </a:p>
@@ -19682,7 +19642,7 @@
                 <a:ea typeface="Times New Roman" pitchFamily="34" charset="-122"/>
                 <a:cs typeface="Times New Roman" pitchFamily="34" charset="-120"/>
               </a:rPr>
-              <a:t>Remediation</a:t>
+              <a:t>Homework</a:t>
             </a:r>
             <a:endParaRPr lang="en-US" sz="3600" dirty="0"/>
           </a:p>
@@ -19716,7 +19676,7 @@
               <a:buNone/>
             </a:pPr>
             <a:r>
-              <a:rPr lang="en-US" sz="4000" b="1" dirty="0">
+              <a:rPr lang="en-US" sz="4000" dirty="0">
                 <a:solidFill>
                   <a:srgbClr val="111111"/>
                 </a:solidFill>
@@ -19724,73 +19684,7 @@
                 <a:ea typeface="Times New Roman" pitchFamily="34" charset="-122"/>
                 <a:cs typeface="Times New Roman" pitchFamily="34" charset="-120"/>
               </a:rPr>
-              <a:t>Fill in the blanks:</a:t>
-            </a:r>
-            <a:endParaRPr lang="en-US" sz="4000" dirty="0"/>
-          </a:p>
-          <a:p>
-            <a:pPr algn="l" marL="342900" indent="-342900">
-              <a:spcAft>
-                <a:spcPts val="800"/>
-              </a:spcAft>
-              <a:buSzPct val="100000"/>
-              <a:buFont typeface="+mj-lt"/>
-              <a:buAutoNum type="arabicPeriod" startAt="1"/>
-            </a:pPr>
-            <a:r>
-              <a:rPr lang="en-US" sz="4000" dirty="0">
-                <a:solidFill>
-                  <a:srgbClr val="111111"/>
-                </a:solidFill>
-                <a:latin typeface="Times New Roman" pitchFamily="34" charset="0"/>
-                <a:ea typeface="Times New Roman" pitchFamily="34" charset="-122"/>
-                <a:cs typeface="Times New Roman" pitchFamily="34" charset="-120"/>
-              </a:rPr>
-              <a:t>The tropics have an energy ______.</a:t>
-            </a:r>
-            <a:endParaRPr lang="en-US" sz="4000" dirty="0"/>
-          </a:p>
-          <a:p>
-            <a:pPr algn="l" marL="342900" indent="-342900">
-              <a:spcAft>
-                <a:spcPts val="800"/>
-              </a:spcAft>
-              <a:buSzPct val="100000"/>
-              <a:buFont typeface="+mj-lt"/>
-              <a:buAutoNum type="arabicPeriod" startAt="1"/>
-            </a:pPr>
-            <a:r>
-              <a:rPr lang="en-US" sz="4000" dirty="0">
-                <a:solidFill>
-                  <a:srgbClr val="111111"/>
-                </a:solidFill>
-                <a:latin typeface="Times New Roman" pitchFamily="34" charset="0"/>
-                <a:ea typeface="Times New Roman" pitchFamily="34" charset="-122"/>
-                <a:cs typeface="Times New Roman" pitchFamily="34" charset="-120"/>
-              </a:rPr>
-              <a:t>Snow has a high ______.</a:t>
-            </a:r>
-            <a:endParaRPr lang="en-US" sz="4000" dirty="0"/>
-          </a:p>
-          <a:p>
-            <a:pPr algn="l" marL="342900" indent="-342900">
-              <a:spcAft>
-                <a:spcPts val="800"/>
-              </a:spcAft>
-              <a:buSzPct val="100000"/>
-              <a:buFont typeface="+mj-lt"/>
-              <a:buAutoNum type="arabicPeriod" startAt="1"/>
-            </a:pPr>
-            <a:r>
-              <a:rPr lang="en-US" sz="4000" dirty="0">
-                <a:solidFill>
-                  <a:srgbClr val="111111"/>
-                </a:solidFill>
-                <a:latin typeface="Times New Roman" pitchFamily="34" charset="0"/>
-                <a:ea typeface="Times New Roman" pitchFamily="34" charset="-122"/>
-                <a:cs typeface="Times New Roman" pitchFamily="34" charset="-120"/>
-              </a:rPr>
-              <a:t>The Gulf Stream is a ______ current.</a:t>
+              <a:t>Define advection.</a:t>
             </a:r>
             <a:endParaRPr lang="en-US" sz="4000" dirty="0"/>
           </a:p>
@@ -19902,7 +19796,7 @@
                 <a:ea typeface="Calibri" pitchFamily="34" charset="-122"/>
                 <a:cs typeface="Calibri" pitchFamily="34" charset="-120"/>
               </a:rPr>
-              <a:t>HOMEWORK</a:t>
+              <a:t>NEXT LESSON</a:t>
             </a:r>
             <a:endParaRPr lang="en-US" sz="1400" dirty="0"/>
           </a:p>
@@ -19967,7 +19861,7 @@
                 <a:ea typeface="Times New Roman" pitchFamily="34" charset="-122"/>
                 <a:cs typeface="Times New Roman" pitchFamily="34" charset="-120"/>
               </a:rPr>
-              <a:t>Homework</a:t>
+              <a:t>Next Lesson</a:t>
             </a:r>
             <a:endParaRPr lang="en-US" sz="3600" dirty="0"/>
           </a:p>
@@ -19991,17 +19885,17 @@
           <a:ln/>
         </p:spPr>
         <p:txBody>
-          <a:bodyPr wrap="square" lIns="0" tIns="0" rIns="0" bIns="0" rtlCol="0" anchor="t"/>
-          <a:lstStyle/>
-          <a:p>
-            <a:pPr algn="l" indent="0" marL="0">
+          <a:bodyPr wrap="square" lIns="0" tIns="0" rIns="0" bIns="0" rtlCol="0" anchor="ctr"/>
+          <a:lstStyle/>
+          <a:p>
+            <a:pPr algn="ctr" indent="0" marL="0">
               <a:spcAft>
                 <a:spcPts val="800"/>
               </a:spcAft>
               <a:buNone/>
             </a:pPr>
             <a:r>
-              <a:rPr lang="en-US" sz="4000" dirty="0">
+              <a:rPr lang="en-US" sz="4000" b="1" dirty="0">
                 <a:solidFill>
                   <a:srgbClr val="111111"/>
                 </a:solidFill>
@@ -20009,7 +19903,27 @@
                 <a:ea typeface="Times New Roman" pitchFamily="34" charset="-122"/>
                 <a:cs typeface="Times New Roman" pitchFamily="34" charset="-120"/>
               </a:rPr>
-              <a:t>Define advection.</a:t>
+              <a:t>Our next lesson will be on:</a:t>
+            </a:r>
+            <a:endParaRPr lang="en-US" sz="4000" dirty="0"/>
+          </a:p>
+          <a:p>
+            <a:pPr algn="ctr" indent="0" marL="0">
+              <a:spcAft>
+                <a:spcPts val="800"/>
+              </a:spcAft>
+              <a:buNone/>
+            </a:pPr>
+            <a:r>
+              <a:rPr lang="en-US" sz="4000" b="1" dirty="0">
+                <a:solidFill>
+                  <a:srgbClr val="990011"/>
+                </a:solidFill>
+                <a:latin typeface="Times New Roman" pitchFamily="34" charset="0"/>
+                <a:ea typeface="Times New Roman" pitchFamily="34" charset="-122"/>
+                <a:cs typeface="Times New Roman" pitchFamily="34" charset="-120"/>
+              </a:rPr>
+              <a:t>Lesson 5: Heat Transport</a:t>
             </a:r>
             <a:endParaRPr lang="en-US" sz="4000" dirty="0"/>
           </a:p>
@@ -20121,245 +20035,6 @@
                 <a:ea typeface="Calibri" pitchFamily="34" charset="-122"/>
                 <a:cs typeface="Calibri" pitchFamily="34" charset="-120"/>
               </a:rPr>
-              <a:t>NEXT LESSON</a:t>
-            </a:r>
-            <a:endParaRPr lang="en-US" sz="1400" dirty="0"/>
-          </a:p>
-        </p:txBody>
-      </p:sp>
-      <p:pic>
-        <p:nvPicPr>
-          <p:cNvPr id="3" name="Image 0" descr="/home/claude/f4/img/minesec_sheet.png">    </p:cNvPr>
-          <p:cNvPicPr>
-            <a:picLocks noChangeAspect="1"/>
-          </p:cNvPicPr>
-          <p:nvPr/>
-        </p:nvPicPr>
-        <p:blipFill>
-          <a:blip r:embed="rId1"/>
-          <a:stretch>
-            <a:fillRect/>
-          </a:stretch>
-        </p:blipFill>
-        <p:spPr>
-          <a:xfrm>
-            <a:off x="0" y="658368"/>
-            <a:ext cx="5120640" cy="5833872"/>
-          </a:xfrm>
-          <a:prstGeom prst="rect">
-            <a:avLst/>
-          </a:prstGeom>
-        </p:spPr>
-      </p:pic>
-      <p:sp>
-        <p:nvSpPr>
-          <p:cNvPr id="4" name="Text 1"/>
-          <p:cNvSpPr/>
-          <p:nvPr/>
-        </p:nvSpPr>
-        <p:spPr>
-          <a:xfrm>
-            <a:off x="5349240" y="1005840"/>
-            <a:ext cx="6522415" cy="731520"/>
-          </a:xfrm>
-          <a:prstGeom prst="rect">
-            <a:avLst/>
-          </a:prstGeom>
-          <a:noFill/>
-          <a:ln/>
-        </p:spPr>
-        <p:txBody>
-          <a:bodyPr wrap="square" lIns="0" tIns="0" rIns="0" bIns="0" rtlCol="0" anchor="ctr">
-            <a:normAutofit/>
-          </a:bodyPr>
-          <a:lstStyle/>
-          <a:p>
-            <a:pPr algn="ctr" indent="0" marL="0">
-              <a:buNone/>
-            </a:pPr>
-            <a:r>
-              <a:rPr lang="en-US" sz="3600" b="1" dirty="0">
-                <a:solidFill>
-                  <a:srgbClr val="990011"/>
-                </a:solidFill>
-                <a:latin typeface="Times New Roman" pitchFamily="34" charset="0"/>
-                <a:ea typeface="Times New Roman" pitchFamily="34" charset="-122"/>
-                <a:cs typeface="Times New Roman" pitchFamily="34" charset="-120"/>
-              </a:rPr>
-              <a:t>Next Lesson</a:t>
-            </a:r>
-            <a:endParaRPr lang="en-US" sz="3600" dirty="0"/>
-          </a:p>
-        </p:txBody>
-      </p:sp>
-      <p:sp>
-        <p:nvSpPr>
-          <p:cNvPr id="5" name="Text 2"/>
-          <p:cNvSpPr/>
-          <p:nvPr/>
-        </p:nvSpPr>
-        <p:spPr>
-          <a:xfrm>
-            <a:off x="5349240" y="1783080"/>
-            <a:ext cx="6522415" cy="4663440"/>
-          </a:xfrm>
-          <a:prstGeom prst="rect">
-            <a:avLst/>
-          </a:prstGeom>
-          <a:noFill/>
-          <a:ln/>
-        </p:spPr>
-        <p:txBody>
-          <a:bodyPr wrap="square" lIns="0" tIns="0" rIns="0" bIns="0" rtlCol="0" anchor="ctr"/>
-          <a:lstStyle/>
-          <a:p>
-            <a:pPr algn="ctr" indent="0" marL="0">
-              <a:spcAft>
-                <a:spcPts val="800"/>
-              </a:spcAft>
-              <a:buNone/>
-            </a:pPr>
-            <a:r>
-              <a:rPr lang="en-US" sz="4000" b="1" dirty="0">
-                <a:solidFill>
-                  <a:srgbClr val="111111"/>
-                </a:solidFill>
-                <a:latin typeface="Times New Roman" pitchFamily="34" charset="0"/>
-                <a:ea typeface="Times New Roman" pitchFamily="34" charset="-122"/>
-                <a:cs typeface="Times New Roman" pitchFamily="34" charset="-120"/>
-              </a:rPr>
-              <a:t>Our next lesson will be on:</a:t>
-            </a:r>
-            <a:endParaRPr lang="en-US" sz="4000" dirty="0"/>
-          </a:p>
-          <a:p>
-            <a:pPr algn="ctr" indent="0" marL="0">
-              <a:spcAft>
-                <a:spcPts val="800"/>
-              </a:spcAft>
-              <a:buNone/>
-            </a:pPr>
-            <a:r>
-              <a:rPr lang="en-US" sz="4000" b="1" dirty="0">
-                <a:solidFill>
-                  <a:srgbClr val="990011"/>
-                </a:solidFill>
-                <a:latin typeface="Times New Roman" pitchFamily="34" charset="0"/>
-                <a:ea typeface="Times New Roman" pitchFamily="34" charset="-122"/>
-                <a:cs typeface="Times New Roman" pitchFamily="34" charset="-120"/>
-              </a:rPr>
-              <a:t>Lesson 5: Heat Transport</a:t>
-            </a:r>
-            <a:endParaRPr lang="en-US" sz="4000" dirty="0"/>
-          </a:p>
-        </p:txBody>
-      </p:sp>
-      <p:sp>
-        <p:nvSpPr>
-          <p:cNvPr id="25" name="Slide Number Placeholder 0"/>
-          <p:cNvSpPr>
-            <a:spLocks noGrp="1"/>
-          </p:cNvSpPr>
-          <p:nvPr>
-            <p:ph type="sldNum" sz="quarter" idx="4294967295"/>
-          </p:nvPr>
-        </p:nvSpPr>
-        <p:spPr>
-          <a:xfrm>
-            <a:off x="27432" y="91440"/>
-            <a:ext cx="585216" cy="475488"/>
-          </a:xfrm>
-          <a:prstGeom prst="rect">
-            <a:avLst/>
-          </a:prstGeom>
-          <a:extLst>
-            <a:ext uri="{C572A759-6A51-4108-AA02-DFA0A04FC94B}">
-              <ma14:wrappingTextBoxFlag xmlns:ma14="http://schemas.microsoft.com/office/mac/drawingml/2011/main" val="0"/>
-            </a:ext>
-          </a:extLst>
-        </p:spPr>
-        <p:txBody>
-          <a:bodyPr/>
-          <a:lstStyle>
-            <a:lvl1pPr>
-              <a:defRPr sz="2000">
-                <a:solidFill>
-                  <a:srgbClr val="FFFFFF"/>
-                </a:solidFill>
-                <a:latin typeface="Calibri"/>
-                <a:ea typeface="Calibri"/>
-                <a:cs typeface="Calibri"/>
-              </a:defRPr>
-            </a:lvl1pPr>
-          </a:lstStyle>
-          <a:p>
-            <a:pPr algn="ctr"/>
-            <a:fld id="{F7021451-1387-4CA6-816F-3879F97B5CBC}" type="slidenum">
-              <a:rPr b="1" lang="en-US"/>
-              <a:t>56</a:t>
-            </a:fld>
-            <a:endParaRPr lang="en-US"/>
-          </a:p>
-        </p:txBody>
-      </p:sp>
-    </p:spTree>
-  </p:cSld>
-  <p:clrMapOvr>
-    <a:masterClrMapping/>
-  </p:clrMapOvr>
-</p:sld>
-</file>
-
-<file path=ppt/slides/slide57.xml><?xml version="1.0" encoding="utf-8"?>
-<p:sld xmlns:a="http://schemas.openxmlformats.org/drawingml/2006/main" xmlns:r="http://schemas.openxmlformats.org/officeDocument/2006/relationships" xmlns:p="http://schemas.openxmlformats.org/presentationml/2006/main">
-  <p:cSld name="Slide 57">
-    <p:spTree>
-      <p:nvGrpSpPr>
-        <p:cNvPr id="1" name=""/>
-        <p:cNvGrpSpPr/>
-        <p:nvPr/>
-      </p:nvGrpSpPr>
-      <p:grpSpPr>
-        <a:xfrm>
-          <a:off x="0" y="0"/>
-          <a:ext cx="0" cy="0"/>
-          <a:chOff x="0" y="0"/>
-          <a:chExt cx="0" cy="0"/>
-        </a:xfrm>
-      </p:grpSpPr>
-      <p:sp>
-        <p:nvSpPr>
-          <p:cNvPr id="2" name="Text 0"/>
-          <p:cNvSpPr/>
-          <p:nvPr/>
-        </p:nvSpPr>
-        <p:spPr>
-          <a:xfrm>
-            <a:off x="457200" y="713232"/>
-            <a:ext cx="11368735" cy="274320"/>
-          </a:xfrm>
-          <a:prstGeom prst="rect">
-            <a:avLst/>
-          </a:prstGeom>
-          <a:noFill/>
-          <a:ln/>
-        </p:spPr>
-        <p:txBody>
-          <a:bodyPr wrap="square" lIns="0" tIns="0" rIns="0" bIns="0" rtlCol="0" anchor="ctr"/>
-          <a:lstStyle/>
-          <a:p>
-            <a:pPr algn="r" indent="0" marL="0">
-              <a:buNone/>
-            </a:pPr>
-            <a:r>
-              <a:rPr lang="en-US" sz="1400" b="1" dirty="0">
-                <a:solidFill>
-                  <a:srgbClr val="1C3F6E"/>
-                </a:solidFill>
-                <a:latin typeface="Calibri" pitchFamily="34" charset="0"/>
-                <a:ea typeface="Calibri" pitchFamily="34" charset="-122"/>
-                <a:cs typeface="Calibri" pitchFamily="34" charset="-120"/>
-              </a:rPr>
               <a:t>BILINGUAL GAME</a:t>
             </a:r>
             <a:endParaRPr lang="en-US" sz="1400" dirty="0"/>
@@ -20407,7 +20082,7 @@
       </p:sp>
       <p:graphicFrame>
         <p:nvGraphicFramePr>
-          <p:cNvPr id="58" name="Table 0"/>
+          <p:cNvPr id="57" name="Table 0"/>
           <p:cNvGraphicFramePr>
             <a:graphicFrameLocks noGrp="1"/>
           </p:cNvGraphicFramePr>
@@ -21443,7 +21118,7 @@
             <a:pPr algn="ctr"/>
             <a:fld id="{F7021451-1387-4CA6-816F-3879F97B5CBC}" type="slidenum">
               <a:rPr b="1" lang="en-US"/>
-              <a:t>57</a:t>
+              <a:t>56</a:t>
             </a:fld>
             <a:endParaRPr lang="en-US"/>
           </a:p>
@@ -21457,9 +21132,9 @@
 </p:sld>
 </file>
 
-<file path=ppt/slides/slide58.xml><?xml version="1.0" encoding="utf-8"?>
+<file path=ppt/slides/slide57.xml><?xml version="1.0" encoding="utf-8"?>
 <p:sld xmlns:a="http://schemas.openxmlformats.org/drawingml/2006/main" xmlns:r="http://schemas.openxmlformats.org/officeDocument/2006/relationships" xmlns:p="http://schemas.openxmlformats.org/presentationml/2006/main">
-  <p:cSld name="Slide 58">
+  <p:cSld name="Slide 57">
     <p:spTree>
       <p:nvGrpSpPr>
         <p:cNvPr id="1" name=""/>
@@ -21554,7 +21229,7 @@
       </p:sp>
       <p:graphicFrame>
         <p:nvGraphicFramePr>
-          <p:cNvPr id="59" name="Table 0"/>
+          <p:cNvPr id="58" name="Table 0"/>
           <p:cNvGraphicFramePr>
             <a:graphicFrameLocks noGrp="1"/>
           </p:cNvGraphicFramePr>
@@ -22176,7 +21851,7 @@
             <a:pPr algn="ctr"/>
             <a:fld id="{F7021451-1387-4CA6-816F-3879F97B5CBC}" type="slidenum">
               <a:rPr b="1" lang="en-US"/>
-              <a:t>58</a:t>
+              <a:t>57</a:t>
             </a:fld>
             <a:endParaRPr lang="en-US"/>
           </a:p>
@@ -22190,9 +21865,9 @@
 </p:sld>
 </file>
 
-<file path=ppt/slides/slide59.xml><?xml version="1.0" encoding="utf-8"?>
+<file path=ppt/slides/slide58.xml><?xml version="1.0" encoding="utf-8"?>
 <p:sld xmlns:a="http://schemas.openxmlformats.org/drawingml/2006/main" xmlns:r="http://schemas.openxmlformats.org/officeDocument/2006/relationships" xmlns:p="http://schemas.openxmlformats.org/presentationml/2006/main">
-  <p:cSld name="Slide 59">
+  <p:cSld name="Slide 58">
     <p:spTree>
       <p:nvGrpSpPr>
         <p:cNvPr id="1" name=""/>
@@ -22287,7 +21962,7 @@
       </p:sp>
       <p:graphicFrame>
         <p:nvGraphicFramePr>
-          <p:cNvPr id="60" name="Table 0"/>
+          <p:cNvPr id="59" name="Table 0"/>
           <p:cNvGraphicFramePr>
             <a:graphicFrameLocks noGrp="1"/>
           </p:cNvGraphicFramePr>
@@ -22397,7 +22072,7 @@
                           <a:ea typeface="Calibri" pitchFamily="34" charset="-122"/>
                           <a:cs typeface="Calibri" pitchFamily="34" charset="-120"/>
                         </a:rPr>
-                        <a:t>DEFINITIONS; The Global Heat Budget; The Latitudinal Heat Imbalance; Reasons for the Imbalance; Balancing Mechanisms (Global Heat Transfer).</a:t>
+                        <a:t>DEFINITIONS; The Global Radiation Balance; Zones of Positive and Negative Balance; Reasons for the Differences; Balancing Mechanisms.</a:t>
                       </a:r>
                       <a:endParaRPr lang="en-US" sz="1600" dirty="0">
                         <a:latin typeface="Calibri" charset="0"/>
@@ -23047,6 +22722,331 @@
             <a:pPr algn="ctr"/>
             <a:fld id="{F7021451-1387-4CA6-816F-3879F97B5CBC}" type="slidenum">
               <a:rPr b="1" lang="en-US"/>
+              <a:t>58</a:t>
+            </a:fld>
+            <a:endParaRPr lang="en-US"/>
+          </a:p>
+        </p:txBody>
+      </p:sp>
+    </p:spTree>
+  </p:cSld>
+  <p:clrMapOvr>
+    <a:masterClrMapping/>
+  </p:clrMapOvr>
+</p:sld>
+</file>
+
+<file path=ppt/slides/slide59.xml><?xml version="1.0" encoding="utf-8"?>
+<p:sld xmlns:a="http://schemas.openxmlformats.org/drawingml/2006/main" xmlns:r="http://schemas.openxmlformats.org/officeDocument/2006/relationships" xmlns:p="http://schemas.openxmlformats.org/presentationml/2006/main">
+  <p:cSld name="Slide 59">
+    <p:spTree>
+      <p:nvGrpSpPr>
+        <p:cNvPr id="1" name=""/>
+        <p:cNvGrpSpPr/>
+        <p:nvPr/>
+      </p:nvGrpSpPr>
+      <p:grpSpPr>
+        <a:xfrm>
+          <a:off x="0" y="0"/>
+          <a:ext cx="0" cy="0"/>
+          <a:chOff x="0" y="0"/>
+          <a:chExt cx="0" cy="0"/>
+        </a:xfrm>
+      </p:grpSpPr>
+      <p:sp>
+        <p:nvSpPr>
+          <p:cNvPr id="2" name="Text 0"/>
+          <p:cNvSpPr/>
+          <p:nvPr/>
+        </p:nvSpPr>
+        <p:spPr>
+          <a:xfrm>
+            <a:off x="457200" y="713232"/>
+            <a:ext cx="11368735" cy="274320"/>
+          </a:xfrm>
+          <a:prstGeom prst="rect">
+            <a:avLst/>
+          </a:prstGeom>
+          <a:noFill/>
+          <a:ln/>
+        </p:spPr>
+        <p:txBody>
+          <a:bodyPr wrap="square" lIns="0" tIns="0" rIns="0" bIns="0" rtlCol="0" anchor="ctr"/>
+          <a:lstStyle/>
+          <a:p>
+            <a:pPr algn="r" indent="0" marL="0">
+              <a:buNone/>
+            </a:pPr>
+            <a:r>
+              <a:rPr lang="en-US" sz="1400" b="1" dirty="0">
+                <a:solidFill>
+                  <a:srgbClr val="1C3F6E"/>
+                </a:solidFill>
+                <a:latin typeface="Calibri" pitchFamily="34" charset="0"/>
+                <a:ea typeface="Calibri" pitchFamily="34" charset="-122"/>
+                <a:cs typeface="Calibri" pitchFamily="34" charset="-120"/>
+              </a:rPr>
+              <a:t>TEACHER'S NOTE</a:t>
+            </a:r>
+            <a:endParaRPr lang="en-US" sz="1400" dirty="0"/>
+          </a:p>
+        </p:txBody>
+      </p:sp>
+      <p:pic>
+        <p:nvPicPr>
+          <p:cNvPr id="3" name="Image 0" descr="/home/claude/f4/img/minesec_sheet.png">    </p:cNvPr>
+          <p:cNvPicPr>
+            <a:picLocks noChangeAspect="1"/>
+          </p:cNvPicPr>
+          <p:nvPr/>
+        </p:nvPicPr>
+        <p:blipFill>
+          <a:blip r:embed="rId1"/>
+          <a:stretch>
+            <a:fillRect/>
+          </a:stretch>
+        </p:blipFill>
+        <p:spPr>
+          <a:xfrm>
+            <a:off x="0" y="658368"/>
+            <a:ext cx="3840480" cy="5833872"/>
+          </a:xfrm>
+          <a:prstGeom prst="rect">
+            <a:avLst/>
+          </a:prstGeom>
+        </p:spPr>
+      </p:pic>
+      <p:sp>
+        <p:nvSpPr>
+          <p:cNvPr id="4" name="Text 1"/>
+          <p:cNvSpPr/>
+          <p:nvPr/>
+        </p:nvSpPr>
+        <p:spPr>
+          <a:xfrm>
+            <a:off x="4069080" y="1005840"/>
+            <a:ext cx="7802575" cy="731520"/>
+          </a:xfrm>
+          <a:prstGeom prst="rect">
+            <a:avLst/>
+          </a:prstGeom>
+          <a:noFill/>
+          <a:ln/>
+        </p:spPr>
+        <p:txBody>
+          <a:bodyPr wrap="square" lIns="0" tIns="0" rIns="0" bIns="0" rtlCol="0" anchor="ctr">
+            <a:normAutofit/>
+          </a:bodyPr>
+          <a:lstStyle/>
+          <a:p>
+            <a:pPr algn="ctr" indent="0" marL="0">
+              <a:buNone/>
+            </a:pPr>
+            <a:r>
+              <a:rPr lang="en-US" sz="3600" b="1" dirty="0">
+                <a:solidFill>
+                  <a:srgbClr val="990011"/>
+                </a:solidFill>
+                <a:latin typeface="Times New Roman" pitchFamily="34" charset="0"/>
+                <a:ea typeface="Times New Roman" pitchFamily="34" charset="-122"/>
+                <a:cs typeface="Times New Roman" pitchFamily="34" charset="-120"/>
+              </a:rPr>
+              <a:t>Teacher's Note</a:t>
+            </a:r>
+            <a:endParaRPr lang="en-US" sz="3600" dirty="0"/>
+          </a:p>
+        </p:txBody>
+      </p:sp>
+      <p:sp>
+        <p:nvSpPr>
+          <p:cNvPr id="5" name="Text 2"/>
+          <p:cNvSpPr/>
+          <p:nvPr/>
+        </p:nvSpPr>
+        <p:spPr>
+          <a:xfrm>
+            <a:off x="4069080" y="1783080"/>
+            <a:ext cx="7802575" cy="4663440"/>
+          </a:xfrm>
+          <a:prstGeom prst="rect">
+            <a:avLst/>
+          </a:prstGeom>
+          <a:noFill/>
+          <a:ln/>
+        </p:spPr>
+        <p:txBody>
+          <a:bodyPr wrap="square" lIns="0" tIns="0" rIns="0" bIns="0" rtlCol="0" anchor="t"/>
+          <a:lstStyle/>
+          <a:p>
+            <a:pPr algn="l" marL="342900" indent="-342900">
+              <a:spcAft>
+                <a:spcPts val="800"/>
+              </a:spcAft>
+              <a:buSzPct val="100000"/>
+              <a:buChar char="•"/>
+            </a:pPr>
+            <a:r>
+              <a:rPr lang="en-US" sz="2000" dirty="0">
+                <a:solidFill>
+                  <a:srgbClr val="111111"/>
+                </a:solidFill>
+                <a:latin typeface="Calibri" pitchFamily="34" charset="0"/>
+                <a:ea typeface="Calibri" pitchFamily="34" charset="-122"/>
+                <a:cs typeface="Calibri" pitchFamily="34" charset="-120"/>
+              </a:rPr>
+              <a:t>Timing: Homework correction, plan, objectives 8 min | Recall, situation, action 10 min | 5 activities 30 min | Board summary (copying) 30 min | Evaluation, remediation 10 min | Homework, next lesson 5 min | Logbook 7 min</a:t>
+            </a:r>
+            <a:endParaRPr lang="en-US" sz="2000" dirty="0"/>
+          </a:p>
+          <a:p>
+            <a:pPr algn="l" marL="342900" indent="-342900">
+              <a:spcAft>
+                <a:spcPts val="800"/>
+              </a:spcAft>
+              <a:buSzPct val="100000"/>
+              <a:buChar char="•"/>
+            </a:pPr>
+            <a:r>
+              <a:rPr lang="en-US" sz="2000" dirty="0">
+                <a:solidFill>
+                  <a:srgbClr val="111111"/>
+                </a:solidFill>
+                <a:latin typeface="Calibri" pitchFamily="34" charset="0"/>
+                <a:ea typeface="Calibri" pitchFamily="34" charset="-122"/>
+                <a:cs typeface="Calibri" pitchFamily="34" charset="-120"/>
+              </a:rPr>
+              <a:t>Without the projector (Activity 1): draw arrows in and out.</a:t>
+            </a:r>
+            <a:endParaRPr lang="en-US" sz="2000" dirty="0"/>
+          </a:p>
+          <a:p>
+            <a:pPr algn="l" marL="342900" indent="-342900">
+              <a:spcAft>
+                <a:spcPts val="800"/>
+              </a:spcAft>
+              <a:buSzPct val="100000"/>
+              <a:buChar char="•"/>
+            </a:pPr>
+            <a:r>
+              <a:rPr lang="en-US" sz="2000" dirty="0">
+                <a:solidFill>
+                  <a:srgbClr val="111111"/>
+                </a:solidFill>
+                <a:latin typeface="Calibri" pitchFamily="34" charset="0"/>
+                <a:ea typeface="Calibri" pitchFamily="34" charset="-122"/>
+                <a:cs typeface="Calibri" pitchFamily="34" charset="-120"/>
+              </a:rPr>
+              <a:t>Without the projector (Activity 2): shade surplus in red and deficit in blue on a sketch.</a:t>
+            </a:r>
+            <a:endParaRPr lang="en-US" sz="2000" dirty="0"/>
+          </a:p>
+          <a:p>
+            <a:pPr algn="l" marL="342900" indent="-342900">
+              <a:spcAft>
+                <a:spcPts val="800"/>
+              </a:spcAft>
+              <a:buSzPct val="100000"/>
+              <a:buChar char="•"/>
+            </a:pPr>
+            <a:r>
+              <a:rPr lang="en-US" sz="2000" dirty="0">
+                <a:solidFill>
+                  <a:srgbClr val="111111"/>
+                </a:solidFill>
+                <a:latin typeface="Calibri" pitchFamily="34" charset="0"/>
+                <a:ea typeface="Calibri" pitchFamily="34" charset="-122"/>
+                <a:cs typeface="Calibri" pitchFamily="34" charset="-120"/>
+              </a:rPr>
+              <a:t>Without the projector (Activity 3): shine a torch straight and slanted.</a:t>
+            </a:r>
+            <a:endParaRPr lang="en-US" sz="2000" dirty="0"/>
+          </a:p>
+          <a:p>
+            <a:pPr algn="l" marL="342900" indent="-342900">
+              <a:spcAft>
+                <a:spcPts val="800"/>
+              </a:spcAft>
+              <a:buSzPct val="100000"/>
+              <a:buChar char="•"/>
+            </a:pPr>
+            <a:r>
+              <a:rPr lang="en-US" sz="2000" dirty="0">
+                <a:solidFill>
+                  <a:srgbClr val="111111"/>
+                </a:solidFill>
+                <a:latin typeface="Calibri" pitchFamily="34" charset="0"/>
+                <a:ea typeface="Calibri" pitchFamily="34" charset="-122"/>
+                <a:cs typeface="Calibri" pitchFamily="34" charset="-120"/>
+              </a:rPr>
+              <a:t>Without the projector (Activity 4): list the four reasons.</a:t>
+            </a:r>
+            <a:endParaRPr lang="en-US" sz="2000" dirty="0"/>
+          </a:p>
+          <a:p>
+            <a:pPr algn="l" marL="342900" indent="-342900">
+              <a:spcAft>
+                <a:spcPts val="800"/>
+              </a:spcAft>
+              <a:buSzPct val="100000"/>
+              <a:buChar char="•"/>
+            </a:pPr>
+            <a:r>
+              <a:rPr lang="en-US" sz="2000" dirty="0">
+                <a:solidFill>
+                  <a:srgbClr val="111111"/>
+                </a:solidFill>
+                <a:latin typeface="Calibri" pitchFamily="34" charset="0"/>
+                <a:ea typeface="Calibri" pitchFamily="34" charset="-122"/>
+                <a:cs typeface="Calibri" pitchFamily="34" charset="-120"/>
+              </a:rPr>
+              <a:t>Without the projector (Activity 5): trace the Gulf Stream on a map.</a:t>
+            </a:r>
+            <a:endParaRPr lang="en-US" sz="2000" dirty="0"/>
+          </a:p>
+        </p:txBody>
+      </p:sp>
+      <p:sp>
+        <p:nvSpPr>
+          <p:cNvPr id="25" name="Slide Number Placeholder 0"/>
+          <p:cNvSpPr>
+            <a:spLocks noGrp="1"/>
+          </p:cNvSpPr>
+          <p:nvPr>
+            <p:ph type="sldNum" sz="quarter" idx="4294967295"/>
+          </p:nvPr>
+        </p:nvSpPr>
+        <p:spPr>
+          <a:xfrm>
+            <a:off x="27432" y="91440"/>
+            <a:ext cx="585216" cy="475488"/>
+          </a:xfrm>
+          <a:prstGeom prst="rect">
+            <a:avLst/>
+          </a:prstGeom>
+          <a:extLst>
+            <a:ext uri="{C572A759-6A51-4108-AA02-DFA0A04FC94B}">
+              <ma14:wrappingTextBoxFlag xmlns:ma14="http://schemas.microsoft.com/office/mac/drawingml/2011/main" val="0"/>
+            </a:ext>
+          </a:extLst>
+        </p:spPr>
+        <p:txBody>
+          <a:bodyPr/>
+          <a:lstStyle>
+            <a:lvl1pPr>
+              <a:defRPr sz="2000">
+                <a:solidFill>
+                  <a:srgbClr val="FFFFFF"/>
+                </a:solidFill>
+                <a:latin typeface="Calibri"/>
+                <a:ea typeface="Calibri"/>
+                <a:cs typeface="Calibri"/>
+              </a:defRPr>
+            </a:lvl1pPr>
+          </a:lstStyle>
+          <a:p>
+            <a:pPr algn="ctr"/>
+            <a:fld id="{F7021451-1387-4CA6-816F-3879F97B5CBC}" type="slidenum">
+              <a:rPr b="1" lang="en-US"/>
               <a:t>59</a:t>
             </a:fld>
             <a:endParaRPr lang="en-US"/>
@@ -23442,7 +23442,7 @@
                 <a:ea typeface="Calibri" pitchFamily="34" charset="-122"/>
                 <a:cs typeface="Calibri" pitchFamily="34" charset="-120"/>
               </a:rPr>
-              <a:t>TEACHER'S NOTE</a:t>
+              <a:t>REFERENCES</a:t>
             </a:r>
             <a:endParaRPr lang="en-US" sz="1400" dirty="0"/>
           </a:p>
@@ -23465,7 +23465,7 @@
         <p:spPr>
           <a:xfrm>
             <a:off x="0" y="658368"/>
-            <a:ext cx="3840480" cy="5833872"/>
+            <a:ext cx="5120640" cy="5833872"/>
           </a:xfrm>
           <a:prstGeom prst="rect">
             <a:avLst/>
@@ -23480,8 +23480,8 @@
         </p:nvSpPr>
         <p:spPr>
           <a:xfrm>
-            <a:off x="4069080" y="1005840"/>
-            <a:ext cx="7802575" cy="731520"/>
+            <a:off x="5349240" y="1005840"/>
+            <a:ext cx="6522415" cy="731520"/>
           </a:xfrm>
           <a:prstGeom prst="rect">
             <a:avLst/>
@@ -23507,7 +23507,7 @@
                 <a:ea typeface="Times New Roman" pitchFamily="34" charset="-122"/>
                 <a:cs typeface="Times New Roman" pitchFamily="34" charset="-120"/>
               </a:rPr>
-              <a:t>Teacher's Note</a:t>
+              <a:t>References</a:t>
             </a:r>
             <a:endParaRPr lang="en-US" sz="3600" dirty="0"/>
           </a:p>
@@ -23521,8 +23521,8 @@
         </p:nvSpPr>
         <p:spPr>
           <a:xfrm>
-            <a:off x="4069080" y="1783080"/>
-            <a:ext cx="7802575" cy="4663440"/>
+            <a:off x="5349240" y="1783080"/>
+            <a:ext cx="6522415" cy="4663440"/>
           </a:xfrm>
           <a:prstGeom prst="rect">
             <a:avLst/>
@@ -23542,7 +23542,7 @@
               <a:buChar char="•"/>
             </a:pPr>
             <a:r>
-              <a:rPr lang="en-US" sz="2000" dirty="0">
+              <a:rPr lang="en-US" sz="1800" dirty="0">
                 <a:solidFill>
                   <a:srgbClr val="111111"/>
                 </a:solidFill>
@@ -23550,9 +23550,9 @@
                 <a:ea typeface="Calibri" pitchFamily="34" charset="-122"/>
                 <a:cs typeface="Calibri" pitchFamily="34" charset="-120"/>
               </a:rPr>
-              <a:t>Timing: Homework correction, plan, objectives 8 min | Recall, situation, action 10 min | 5 activities 30 min | Board summary (copying) 30 min | Evaluation, remediation 10 min | Homework, next lesson 5 min | Logbook 7 min</a:t>
-            </a:r>
-            <a:endParaRPr lang="en-US" sz="2000" dirty="0"/>
+              <a:t>Geography Syllabus for Sixth Forms (Lower and Upper Sixth), MINESEC, 2019 — Module 1 (Meteorology, Climatology &amp; Hydrology).</a:t>
+            </a:r>
+            <a:endParaRPr lang="en-US" sz="1800" dirty="0"/>
           </a:p>
           <a:p>
             <a:pPr algn="l" marL="342900" indent="-342900">
@@ -23563,7 +23563,7 @@
               <a:buChar char="•"/>
             </a:pPr>
             <a:r>
-              <a:rPr lang="en-US" sz="2000" dirty="0">
+              <a:rPr lang="en-US" sz="1800" dirty="0">
                 <a:solidFill>
                   <a:srgbClr val="111111"/>
                 </a:solidFill>
@@ -23571,9 +23571,9 @@
                 <a:ea typeface="Calibri" pitchFamily="34" charset="-122"/>
                 <a:cs typeface="Calibri" pitchFamily="34" charset="-120"/>
               </a:rPr>
-              <a:t>Without the projector (Activity 1): draw arrows in and out.</a:t>
-            </a:r>
-            <a:endParaRPr lang="en-US" sz="2000" dirty="0"/>
+              <a:t>Teacher's course notes: Mr KAMDEM E., Meteorology (LSA), GBHS Garoua, 2026.</a:t>
+            </a:r>
+            <a:endParaRPr lang="en-US" sz="1800" dirty="0"/>
           </a:p>
           <a:p>
             <a:pPr algn="l" marL="342900" indent="-342900">
@@ -23584,7 +23584,7 @@
               <a:buChar char="•"/>
             </a:pPr>
             <a:r>
-              <a:rPr lang="en-US" sz="2000" dirty="0">
+              <a:rPr lang="en-US" sz="1800" dirty="0">
                 <a:solidFill>
                   <a:srgbClr val="111111"/>
                 </a:solidFill>
@@ -23592,72 +23592,9 @@
                 <a:ea typeface="Calibri" pitchFamily="34" charset="-122"/>
                 <a:cs typeface="Calibri" pitchFamily="34" charset="-120"/>
               </a:rPr>
-              <a:t>Without the projector (Activity 2): shade surplus in red and deficit in blue on a sketch.</a:t>
-            </a:r>
-            <a:endParaRPr lang="en-US" sz="2000" dirty="0"/>
-          </a:p>
-          <a:p>
-            <a:pPr algn="l" marL="342900" indent="-342900">
-              <a:spcAft>
-                <a:spcPts val="800"/>
-              </a:spcAft>
-              <a:buSzPct val="100000"/>
-              <a:buChar char="•"/>
-            </a:pPr>
-            <a:r>
-              <a:rPr lang="en-US" sz="2000" dirty="0">
-                <a:solidFill>
-                  <a:srgbClr val="111111"/>
-                </a:solidFill>
-                <a:latin typeface="Calibri" pitchFamily="34" charset="0"/>
-                <a:ea typeface="Calibri" pitchFamily="34" charset="-122"/>
-                <a:cs typeface="Calibri" pitchFamily="34" charset="-120"/>
-              </a:rPr>
-              <a:t>Without the projector (Activity 3): shine a torch straight and slanted.</a:t>
-            </a:r>
-            <a:endParaRPr lang="en-US" sz="2000" dirty="0"/>
-          </a:p>
-          <a:p>
-            <a:pPr algn="l" marL="342900" indent="-342900">
-              <a:spcAft>
-                <a:spcPts val="800"/>
-              </a:spcAft>
-              <a:buSzPct val="100000"/>
-              <a:buChar char="•"/>
-            </a:pPr>
-            <a:r>
-              <a:rPr lang="en-US" sz="2000" dirty="0">
-                <a:solidFill>
-                  <a:srgbClr val="111111"/>
-                </a:solidFill>
-                <a:latin typeface="Calibri" pitchFamily="34" charset="0"/>
-                <a:ea typeface="Calibri" pitchFamily="34" charset="-122"/>
-                <a:cs typeface="Calibri" pitchFamily="34" charset="-120"/>
-              </a:rPr>
-              <a:t>Without the projector (Activity 4): list the four reasons.</a:t>
-            </a:r>
-            <a:endParaRPr lang="en-US" sz="2000" dirty="0"/>
-          </a:p>
-          <a:p>
-            <a:pPr algn="l" marL="342900" indent="-342900">
-              <a:spcAft>
-                <a:spcPts val="800"/>
-              </a:spcAft>
-              <a:buSzPct val="100000"/>
-              <a:buChar char="•"/>
-            </a:pPr>
-            <a:r>
-              <a:rPr lang="en-US" sz="2000" dirty="0">
-                <a:solidFill>
-                  <a:srgbClr val="111111"/>
-                </a:solidFill>
-                <a:latin typeface="Calibri" pitchFamily="34" charset="0"/>
-                <a:ea typeface="Calibri" pitchFamily="34" charset="-122"/>
-                <a:cs typeface="Calibri" pitchFamily="34" charset="-120"/>
-              </a:rPr>
-              <a:t>Without the projector (Activity 5): trace the Gulf Stream on a map.</a:t>
-            </a:r>
-            <a:endParaRPr lang="en-US" sz="2000" dirty="0"/>
+              <a:t>Diagrams and animations: drawn for this lesson (Geography Department).</a:t>
+            </a:r>
+            <a:endParaRPr lang="en-US" sz="1800" dirty="0"/>
           </a:p>
         </p:txBody>
       </p:sp>
@@ -23704,268 +23641,6 @@
             <a:fld id="{F7021451-1387-4CA6-816F-3879F97B5CBC}" type="slidenum">
               <a:rPr b="1" lang="en-US"/>
               <a:t>60</a:t>
-            </a:fld>
-            <a:endParaRPr lang="en-US"/>
-          </a:p>
-        </p:txBody>
-      </p:sp>
-    </p:spTree>
-  </p:cSld>
-  <p:clrMapOvr>
-    <a:masterClrMapping/>
-  </p:clrMapOvr>
-</p:sld>
-</file>
-
-<file path=ppt/slides/slide61.xml><?xml version="1.0" encoding="utf-8"?>
-<p:sld xmlns:a="http://schemas.openxmlformats.org/drawingml/2006/main" xmlns:r="http://schemas.openxmlformats.org/officeDocument/2006/relationships" xmlns:p="http://schemas.openxmlformats.org/presentationml/2006/main">
-  <p:cSld name="Slide 61">
-    <p:spTree>
-      <p:nvGrpSpPr>
-        <p:cNvPr id="1" name=""/>
-        <p:cNvGrpSpPr/>
-        <p:nvPr/>
-      </p:nvGrpSpPr>
-      <p:grpSpPr>
-        <a:xfrm>
-          <a:off x="0" y="0"/>
-          <a:ext cx="0" cy="0"/>
-          <a:chOff x="0" y="0"/>
-          <a:chExt cx="0" cy="0"/>
-        </a:xfrm>
-      </p:grpSpPr>
-      <p:sp>
-        <p:nvSpPr>
-          <p:cNvPr id="2" name="Text 0"/>
-          <p:cNvSpPr/>
-          <p:nvPr/>
-        </p:nvSpPr>
-        <p:spPr>
-          <a:xfrm>
-            <a:off x="457200" y="713232"/>
-            <a:ext cx="11368735" cy="274320"/>
-          </a:xfrm>
-          <a:prstGeom prst="rect">
-            <a:avLst/>
-          </a:prstGeom>
-          <a:noFill/>
-          <a:ln/>
-        </p:spPr>
-        <p:txBody>
-          <a:bodyPr wrap="square" lIns="0" tIns="0" rIns="0" bIns="0" rtlCol="0" anchor="ctr"/>
-          <a:lstStyle/>
-          <a:p>
-            <a:pPr algn="r" indent="0" marL="0">
-              <a:buNone/>
-            </a:pPr>
-            <a:r>
-              <a:rPr lang="en-US" sz="1400" b="1" dirty="0">
-                <a:solidFill>
-                  <a:srgbClr val="1C3F6E"/>
-                </a:solidFill>
-                <a:latin typeface="Calibri" pitchFamily="34" charset="0"/>
-                <a:ea typeface="Calibri" pitchFamily="34" charset="-122"/>
-                <a:cs typeface="Calibri" pitchFamily="34" charset="-120"/>
-              </a:rPr>
-              <a:t>REFERENCES</a:t>
-            </a:r>
-            <a:endParaRPr lang="en-US" sz="1400" dirty="0"/>
-          </a:p>
-        </p:txBody>
-      </p:sp>
-      <p:pic>
-        <p:nvPicPr>
-          <p:cNvPr id="3" name="Image 0" descr="/home/claude/f4/img/minesec_sheet.png">    </p:cNvPr>
-          <p:cNvPicPr>
-            <a:picLocks noChangeAspect="1"/>
-          </p:cNvPicPr>
-          <p:nvPr/>
-        </p:nvPicPr>
-        <p:blipFill>
-          <a:blip r:embed="rId1"/>
-          <a:stretch>
-            <a:fillRect/>
-          </a:stretch>
-        </p:blipFill>
-        <p:spPr>
-          <a:xfrm>
-            <a:off x="0" y="658368"/>
-            <a:ext cx="5120640" cy="5833872"/>
-          </a:xfrm>
-          <a:prstGeom prst="rect">
-            <a:avLst/>
-          </a:prstGeom>
-        </p:spPr>
-      </p:pic>
-      <p:sp>
-        <p:nvSpPr>
-          <p:cNvPr id="4" name="Text 1"/>
-          <p:cNvSpPr/>
-          <p:nvPr/>
-        </p:nvSpPr>
-        <p:spPr>
-          <a:xfrm>
-            <a:off x="5349240" y="1005840"/>
-            <a:ext cx="6522415" cy="731520"/>
-          </a:xfrm>
-          <a:prstGeom prst="rect">
-            <a:avLst/>
-          </a:prstGeom>
-          <a:noFill/>
-          <a:ln/>
-        </p:spPr>
-        <p:txBody>
-          <a:bodyPr wrap="square" lIns="0" tIns="0" rIns="0" bIns="0" rtlCol="0" anchor="ctr">
-            <a:normAutofit/>
-          </a:bodyPr>
-          <a:lstStyle/>
-          <a:p>
-            <a:pPr algn="ctr" indent="0" marL="0">
-              <a:buNone/>
-            </a:pPr>
-            <a:r>
-              <a:rPr lang="en-US" sz="3600" b="1" dirty="0">
-                <a:solidFill>
-                  <a:srgbClr val="990011"/>
-                </a:solidFill>
-                <a:latin typeface="Times New Roman" pitchFamily="34" charset="0"/>
-                <a:ea typeface="Times New Roman" pitchFamily="34" charset="-122"/>
-                <a:cs typeface="Times New Roman" pitchFamily="34" charset="-120"/>
-              </a:rPr>
-              <a:t>References</a:t>
-            </a:r>
-            <a:endParaRPr lang="en-US" sz="3600" dirty="0"/>
-          </a:p>
-        </p:txBody>
-      </p:sp>
-      <p:sp>
-        <p:nvSpPr>
-          <p:cNvPr id="5" name="Text 2"/>
-          <p:cNvSpPr/>
-          <p:nvPr/>
-        </p:nvSpPr>
-        <p:spPr>
-          <a:xfrm>
-            <a:off x="5349240" y="1783080"/>
-            <a:ext cx="6522415" cy="4663440"/>
-          </a:xfrm>
-          <a:prstGeom prst="rect">
-            <a:avLst/>
-          </a:prstGeom>
-          <a:noFill/>
-          <a:ln/>
-        </p:spPr>
-        <p:txBody>
-          <a:bodyPr wrap="square" lIns="0" tIns="0" rIns="0" bIns="0" rtlCol="0" anchor="t"/>
-          <a:lstStyle/>
-          <a:p>
-            <a:pPr algn="l" marL="342900" indent="-342900">
-              <a:spcAft>
-                <a:spcPts val="800"/>
-              </a:spcAft>
-              <a:buSzPct val="100000"/>
-              <a:buChar char="•"/>
-            </a:pPr>
-            <a:r>
-              <a:rPr lang="en-US" sz="1800" dirty="0">
-                <a:solidFill>
-                  <a:srgbClr val="111111"/>
-                </a:solidFill>
-                <a:latin typeface="Calibri" pitchFamily="34" charset="0"/>
-                <a:ea typeface="Calibri" pitchFamily="34" charset="-122"/>
-                <a:cs typeface="Calibri" pitchFamily="34" charset="-120"/>
-              </a:rPr>
-              <a:t>Geography Syllabus for Sixth Forms (Lower and Upper Sixth), MINESEC, 2019 — Module 1 (Meteorology, Climatology &amp; Hydrology).</a:t>
-            </a:r>
-            <a:endParaRPr lang="en-US" sz="1800" dirty="0"/>
-          </a:p>
-          <a:p>
-            <a:pPr algn="l" marL="342900" indent="-342900">
-              <a:spcAft>
-                <a:spcPts val="800"/>
-              </a:spcAft>
-              <a:buSzPct val="100000"/>
-              <a:buChar char="•"/>
-            </a:pPr>
-            <a:r>
-              <a:rPr lang="en-US" sz="1800" dirty="0">
-                <a:solidFill>
-                  <a:srgbClr val="111111"/>
-                </a:solidFill>
-                <a:latin typeface="Calibri" pitchFamily="34" charset="0"/>
-                <a:ea typeface="Calibri" pitchFamily="34" charset="-122"/>
-                <a:cs typeface="Calibri" pitchFamily="34" charset="-120"/>
-              </a:rPr>
-              <a:t>Teacher's course notes: Mr KAMDEM E., Meteorology (LSA), GBHS Garoua, 2026.</a:t>
-            </a:r>
-            <a:endParaRPr lang="en-US" sz="1800" dirty="0"/>
-          </a:p>
-          <a:p>
-            <a:pPr algn="l" marL="342900" indent="-342900">
-              <a:spcAft>
-                <a:spcPts val="800"/>
-              </a:spcAft>
-              <a:buSzPct val="100000"/>
-              <a:buChar char="•"/>
-            </a:pPr>
-            <a:r>
-              <a:rPr lang="en-US" sz="1800" dirty="0">
-                <a:solidFill>
-                  <a:srgbClr val="111111"/>
-                </a:solidFill>
-                <a:latin typeface="Calibri" pitchFamily="34" charset="0"/>
-                <a:ea typeface="Calibri" pitchFamily="34" charset="-122"/>
-                <a:cs typeface="Calibri" pitchFamily="34" charset="-120"/>
-              </a:rPr>
-              <a:t>Diagrams and animations: drawn for this lesson (Geography Department).</a:t>
-            </a:r>
-            <a:endParaRPr lang="en-US" sz="1800" dirty="0"/>
-          </a:p>
-        </p:txBody>
-      </p:sp>
-      <p:sp>
-        <p:nvSpPr>
-          <p:cNvPr id="25" name="Slide Number Placeholder 0"/>
-          <p:cNvSpPr>
-            <a:spLocks noGrp="1"/>
-          </p:cNvSpPr>
-          <p:nvPr>
-            <p:ph type="sldNum" sz="quarter" idx="4294967295"/>
-          </p:nvPr>
-        </p:nvSpPr>
-        <p:spPr>
-          <a:xfrm>
-            <a:off x="27432" y="91440"/>
-            <a:ext cx="585216" cy="475488"/>
-          </a:xfrm>
-          <a:prstGeom prst="rect">
-            <a:avLst/>
-          </a:prstGeom>
-          <a:extLst>
-            <a:ext uri="{C572A759-6A51-4108-AA02-DFA0A04FC94B}">
-              <ma14:wrappingTextBoxFlag xmlns:ma14="http://schemas.microsoft.com/office/mac/drawingml/2011/main" val="0"/>
-            </a:ext>
-          </a:extLst>
-        </p:spPr>
-        <p:txBody>
-          <a:bodyPr/>
-          <a:lstStyle>
-            <a:lvl1pPr>
-              <a:defRPr sz="2000">
-                <a:solidFill>
-                  <a:srgbClr val="FFFFFF"/>
-                </a:solidFill>
-                <a:latin typeface="Calibri"/>
-                <a:ea typeface="Calibri"/>
-                <a:cs typeface="Calibri"/>
-              </a:defRPr>
-            </a:lvl1pPr>
-          </a:lstStyle>
-          <a:p>
-            <a:pPr algn="ctr"/>
-            <a:fld id="{F7021451-1387-4CA6-816F-3879F97B5CBC}" type="slidenum">
-              <a:rPr b="1" lang="en-US"/>
-              <a:t>61</a:t>
             </a:fld>
             <a:endParaRPr lang="en-US"/>
           </a:p>
